--- a/update3/CSE299_Group1_Update3_Presentation.pptx
+++ b/update3/CSE299_Group1_Update3_Presentation.pptx
@@ -4,6 +4,9 @@
   <p:sldMasterIdLst>
     <p:sldMasterId id="2147483648" r:id="rId1"/>
   </p:sldMasterIdLst>
+  <p:notesMasterIdLst>
+    <p:notesMasterId r:id="rId12"/>
+  </p:notesMasterIdLst>
   <p:sldIdLst>
     <p:sldId id="256" r:id="rId2"/>
     <p:sldId id="257" r:id="rId3"/>
@@ -16,10 +19,7 @@
     <p:sldId id="264" r:id="rId10"/>
     <p:sldId id="265" r:id="rId11"/>
   </p:sldIdLst>
-  <p:notesMasterIdLst>
-    <p:notesMasterId r:id="rId12"/>
-  </p:notesMasterIdLst>
-  <p:sldSz cx="9144000" cy="5143500"/>
+  <p:sldSz cx="9144000" cy="5143500" type="screen16x9"/>
   <p:notesSz cx="5143500" cy="9144000"/>
   <p:defaultTextStyle>
     <a:lvl1pPr marL="0" algn="l" defTabSz="914400" rtl="0" eaLnBrk="1" latinLnBrk="0" hangingPunct="1">
@@ -113,6 +113,11 @@
       </a:defRPr>
     </a:lvl9pPr>
   </p:defaultTextStyle>
+  <p:extLst>
+    <p:ext uri="{EFAFB233-063F-42B5-8137-9DF3F51BA10A}">
+      <p15:sldGuideLst xmlns:p15="http://schemas.microsoft.com/office/powerpoint/2012/main"/>
+    </p:ext>
+  </p:extLst>
 </p:presentation>
 </file>
 
@@ -138,234 +143,10 @@
           <a:chExt cx="0" cy="0"/>
         </a:xfrm>
       </p:grpSpPr>
-      <p:sp>
-        <p:nvSpPr>
-          <p:cNvPr id="2" name="Header Placeholder 1"/>
-          <p:cNvSpPr>
-            <a:spLocks noGrp="1"/>
-          </p:cNvSpPr>
-          <p:nvPr>
-            <p:ph type="hdr" sz="quarter"/>
-          </p:nvPr>
-        </p:nvSpPr>
-        <p:spPr>
-          <a:xfrm>
-            <a:off x="0" y="0"/>
-            <a:ext cx="2971800" cy="458788"/>
-          </a:xfrm>
-          <a:prstGeom prst="rect">
-            <a:avLst/>
-          </a:prstGeom>
-        </p:spPr>
-        <p:txBody>
-          <a:bodyPr vert="horz" lIns="91440" tIns="45720" rIns="91440" bIns="45720" rtlCol="0"/>
-          <a:lstStyle>
-            <a:lvl1pPr algn="l">
-              <a:defRPr sz="1200"/>
-            </a:lvl1pPr>
-          </a:lstStyle>
-          <a:p>
-            <a:endParaRPr lang="en-US"/>
-          </a:p>
-        </p:txBody>
-      </p:sp>
-      <p:sp>
-        <p:nvSpPr>
-          <p:cNvPr id="3" name="Date Placeholder 2"/>
-          <p:cNvSpPr>
-            <a:spLocks noGrp="1"/>
-          </p:cNvSpPr>
-          <p:nvPr>
-            <p:ph type="dt" idx="1"/>
-          </p:nvPr>
-        </p:nvSpPr>
-        <p:spPr>
-          <a:xfrm>
-            <a:off x="3884613" y="0"/>
-            <a:ext cx="2971800" cy="458788"/>
-          </a:xfrm>
-          <a:prstGeom prst="rect">
-            <a:avLst/>
-          </a:prstGeom>
-        </p:spPr>
-        <p:txBody>
-          <a:bodyPr vert="horz" lIns="91440" tIns="45720" rIns="91440" bIns="45720" rtlCol="0"/>
-          <a:lstStyle>
-            <a:lvl1pPr algn="r">
-              <a:defRPr sz="1200"/>
-            </a:lvl1pPr>
-          </a:lstStyle>
-          <a:p>
-            <a:fld id="{5282F153-3F37-0F45-9E97-73ACFA13230C}" type="datetimeFigureOut">
-              <a:rPr lang="en-US"/>
-              <a:t>7/23/19</a:t>
-            </a:fld>
-            <a:endParaRPr lang="en-US"/>
-          </a:p>
-        </p:txBody>
-      </p:sp>
-      <p:sp>
-        <p:nvSpPr>
-          <p:cNvPr id="4" name="Slide Image Placeholder 3"/>
-          <p:cNvSpPr>
-            <a:spLocks noGrp="1" noRot="1" noChangeAspect="1"/>
-          </p:cNvSpPr>
-          <p:nvPr>
-            <p:ph type="sldImg" idx="2"/>
-          </p:nvPr>
-        </p:nvSpPr>
-        <p:spPr>
-          <a:xfrm>
-            <a:off x="685800" y="1143000"/>
-            <a:ext cx="5486400" cy="3086100"/>
-          </a:xfrm>
-          <a:prstGeom prst="rect">
-            <a:avLst/>
-          </a:prstGeom>
-          <a:noFill/>
-          <a:ln w="12700">
-            <a:solidFill>
-              <a:prstClr val="black"/>
-            </a:solidFill>
-          </a:ln>
-        </p:spPr>
-        <p:txBody>
-          <a:bodyPr vert="horz" lIns="91440" tIns="45720" rIns="91440" bIns="45720" rtlCol="0" anchor="ctr"/>
-          <a:lstStyle/>
-          <a:p>
-            <a:endParaRPr lang="en-US"/>
-          </a:p>
-        </p:txBody>
-      </p:sp>
-      <p:sp>
-        <p:nvSpPr>
-          <p:cNvPr id="5" name="Notes Placeholder 4"/>
-          <p:cNvSpPr>
-            <a:spLocks noGrp="1"/>
-          </p:cNvSpPr>
-          <p:nvPr>
-            <p:ph type="body" sz="quarter" idx="3"/>
-          </p:nvPr>
-        </p:nvSpPr>
-        <p:spPr>
-          <a:xfrm>
-            <a:off x="685800" y="4400550"/>
-            <a:ext cx="5486400" cy="3600450"/>
-          </a:xfrm>
-          <a:prstGeom prst="rect">
-            <a:avLst/>
-          </a:prstGeom>
-        </p:spPr>
-        <p:txBody>
-          <a:bodyPr vert="horz" lIns="91440" tIns="45720" rIns="91440" bIns="45720" rtlCol="0"/>
-          <a:lstStyle/>
-          <a:p>
-            <a:pPr lvl="0"/>
-            <a:r>
-              <a:rPr lang="en-US"/>
-              <a:t>Click to edit Master text styles</a:t>
-            </a:r>
-          </a:p>
-          <a:p>
-            <a:pPr lvl="1"/>
-            <a:r>
-              <a:rPr lang="en-US"/>
-              <a:t>Second level</a:t>
-            </a:r>
-          </a:p>
-          <a:p>
-            <a:pPr lvl="2"/>
-            <a:r>
-              <a:rPr lang="en-US"/>
-              <a:t>Third level</a:t>
-            </a:r>
-          </a:p>
-          <a:p>
-            <a:pPr lvl="3"/>
-            <a:r>
-              <a:rPr lang="en-US"/>
-              <a:t>Fourth level</a:t>
-            </a:r>
-          </a:p>
-          <a:p>
-            <a:pPr lvl="4"/>
-            <a:r>
-              <a:rPr lang="en-US"/>
-              <a:t>Fifth level</a:t>
-            </a:r>
-          </a:p>
-        </p:txBody>
-      </p:sp>
-      <p:sp>
-        <p:nvSpPr>
-          <p:cNvPr id="6" name="Footer Placeholder 5"/>
-          <p:cNvSpPr>
-            <a:spLocks noGrp="1"/>
-          </p:cNvSpPr>
-          <p:nvPr>
-            <p:ph type="ftr" sz="quarter" idx="4"/>
-          </p:nvPr>
-        </p:nvSpPr>
-        <p:spPr>
-          <a:xfrm>
-            <a:off x="0" y="8685213"/>
-            <a:ext cx="2971800" cy="458787"/>
-          </a:xfrm>
-          <a:prstGeom prst="rect">
-            <a:avLst/>
-          </a:prstGeom>
-        </p:spPr>
-        <p:txBody>
-          <a:bodyPr vert="horz" lIns="91440" tIns="45720" rIns="91440" bIns="45720" rtlCol="0" anchor="b"/>
-          <a:lstStyle>
-            <a:lvl1pPr algn="l">
-              <a:defRPr sz="1200"/>
-            </a:lvl1pPr>
-          </a:lstStyle>
-          <a:p>
-            <a:endParaRPr lang="en-US"/>
-          </a:p>
-        </p:txBody>
-      </p:sp>
-      <p:sp>
-        <p:nvSpPr>
-          <p:cNvPr id="7" name="Slide Number Placeholder 6"/>
-          <p:cNvSpPr>
-            <a:spLocks noGrp="1"/>
-          </p:cNvSpPr>
-          <p:nvPr>
-            <p:ph type="sldNum" sz="quarter" idx="5"/>
-          </p:nvPr>
-        </p:nvSpPr>
-        <p:spPr>
-          <a:xfrm>
-            <a:off x="3884613" y="8685213"/>
-            <a:ext cx="2971800" cy="458787"/>
-          </a:xfrm>
-          <a:prstGeom prst="rect">
-            <a:avLst/>
-          </a:prstGeom>
-        </p:spPr>
-        <p:txBody>
-          <a:bodyPr vert="horz" lIns="91440" tIns="45720" rIns="91440" bIns="45720" rtlCol="0" anchor="b"/>
-          <a:lstStyle>
-            <a:lvl1pPr algn="r">
-              <a:defRPr sz="1200"/>
-            </a:lvl1pPr>
-          </a:lstStyle>
-          <a:p>
-            <a:fld id="{CE5E9CC1-C706-0F49-92D6-E571CC5EEA8F}" type="slidenum">
-              <a:rPr lang="en-US"/>
-              <a:t>‹#›</a:t>
-            </a:fld>
-            <a:endParaRPr lang="en-US"/>
-          </a:p>
-        </p:txBody>
-      </p:sp>
     </p:spTree>
     <p:extLst>
       <p:ext uri="{BB962C8B-B14F-4D97-AF65-F5344CB8AC3E}">
-        <p14:creationId xmlns:p14="http://schemas.microsoft.com/office/powerpoint/2010/main" val="1024086991"/>
+        <p14:creationId xmlns:p14="http://schemas.microsoft.com/office/powerpoint/2010/main" val="512993799"/>
       </p:ext>
     </p:extLst>
   </p:cSld>
@@ -509,10 +290,6 @@
           <a:bodyPr/>
           <a:lstStyle/>
           <a:p>
-            <a:r>
-              <a:rPr lang="en-US" dirty="0"/>
-              <a:t/>
-            </a:r>
             <a:endParaRPr lang="en-US" dirty="0"/>
           </a:p>
         </p:txBody>
@@ -597,10 +374,6 @@
           <a:bodyPr/>
           <a:lstStyle/>
           <a:p>
-            <a:r>
-              <a:rPr lang="en-US" dirty="0"/>
-              <a:t/>
-            </a:r>
             <a:endParaRPr lang="en-US" dirty="0"/>
           </a:p>
         </p:txBody>
@@ -685,10 +458,6 @@
           <a:bodyPr/>
           <a:lstStyle/>
           <a:p>
-            <a:r>
-              <a:rPr lang="en-US" dirty="0"/>
-              <a:t/>
-            </a:r>
             <a:endParaRPr lang="en-US" dirty="0"/>
           </a:p>
         </p:txBody>
@@ -773,10 +542,6 @@
           <a:bodyPr/>
           <a:lstStyle/>
           <a:p>
-            <a:r>
-              <a:rPr lang="en-US" dirty="0"/>
-              <a:t/>
-            </a:r>
             <a:endParaRPr lang="en-US" dirty="0"/>
           </a:p>
         </p:txBody>
@@ -861,10 +626,6 @@
           <a:bodyPr/>
           <a:lstStyle/>
           <a:p>
-            <a:r>
-              <a:rPr lang="en-US" dirty="0"/>
-              <a:t/>
-            </a:r>
             <a:endParaRPr lang="en-US" dirty="0"/>
           </a:p>
         </p:txBody>
@@ -949,10 +710,6 @@
           <a:bodyPr/>
           <a:lstStyle/>
           <a:p>
-            <a:r>
-              <a:rPr lang="en-US" dirty="0"/>
-              <a:t/>
-            </a:r>
             <a:endParaRPr lang="en-US" dirty="0"/>
           </a:p>
         </p:txBody>
@@ -1037,10 +794,6 @@
           <a:bodyPr/>
           <a:lstStyle/>
           <a:p>
-            <a:r>
-              <a:rPr lang="en-US" dirty="0"/>
-              <a:t/>
-            </a:r>
             <a:endParaRPr lang="en-US" dirty="0"/>
           </a:p>
         </p:txBody>
@@ -1125,10 +878,6 @@
           <a:bodyPr/>
           <a:lstStyle/>
           <a:p>
-            <a:r>
-              <a:rPr lang="en-US" dirty="0"/>
-              <a:t/>
-            </a:r>
             <a:endParaRPr lang="en-US" dirty="0"/>
           </a:p>
         </p:txBody>
@@ -1213,10 +962,6 @@
           <a:bodyPr/>
           <a:lstStyle/>
           <a:p>
-            <a:r>
-              <a:rPr lang="en-US" dirty="0"/>
-              <a:t/>
-            </a:r>
             <a:endParaRPr lang="en-US" dirty="0"/>
           </a:p>
         </p:txBody>
@@ -1301,10 +1046,6 @@
           <a:bodyPr/>
           <a:lstStyle/>
           <a:p>
-            <a:r>
-              <a:rPr lang="en-US" dirty="0"/>
-              <a:t/>
-            </a:r>
             <a:endParaRPr lang="en-US" dirty="0"/>
           </a:p>
         </p:txBody>
@@ -1378,6 +1119,11 @@
 <file path=ppt/slideMasters/slideMaster1.xml><?xml version="1.0" encoding="utf-8"?>
 <p:sldMaster xmlns:a="http://schemas.openxmlformats.org/drawingml/2006/main" xmlns:r="http://schemas.openxmlformats.org/officeDocument/2006/relationships" xmlns:p="http://schemas.openxmlformats.org/presentationml/2006/main">
   <p:cSld>
+    <p:bg>
+      <p:bgRef idx="1001">
+        <a:schemeClr val="bg1"/>
+      </p:bgRef>
+    </p:bg>
     <p:spTree>
       <p:nvGrpSpPr>
         <p:cNvPr id="1" name=""/>
@@ -1660,6 +1406,7 @@
         <a:solidFill>
           <a:srgbClr val="0B1F3A"/>
         </a:solidFill>
+        <a:effectLst/>
       </p:bgPr>
     </p:bg>
     <p:spTree>
@@ -1751,7 +1498,7 @@
           <a:bodyPr wrap="square" lIns="0" tIns="0" rIns="0" bIns="0" rtlCol="0" anchor="ctr"/>
           <a:lstStyle/>
           <a:p>
-            <a:pPr indent="0" marL="0">
+            <a:pPr marL="0" indent="0">
               <a:buNone/>
             </a:pPr>
             <a:r>
@@ -1790,7 +1537,7 @@
           <a:bodyPr wrap="square" lIns="0" tIns="0" rIns="0" bIns="0" rtlCol="0" anchor="ctr"/>
           <a:lstStyle/>
           <a:p>
-            <a:pPr indent="0" marL="0">
+            <a:pPr marL="0" indent="0">
               <a:buNone/>
             </a:pPr>
             <a:r>
@@ -1829,7 +1576,7 @@
           <a:bodyPr wrap="square" lIns="0" tIns="0" rIns="0" bIns="0" rtlCol="0" anchor="ctr"/>
           <a:lstStyle/>
           <a:p>
-            <a:pPr indent="0" marL="0">
+            <a:pPr marL="0" indent="0">
               <a:buNone/>
             </a:pPr>
             <a:r>
@@ -1868,7 +1615,7 @@
           <a:bodyPr wrap="square" lIns="0" tIns="0" rIns="0" bIns="0" rtlCol="0" anchor="ctr"/>
           <a:lstStyle/>
           <a:p>
-            <a:pPr indent="0" marL="0">
+            <a:pPr marL="0" indent="0">
               <a:buNone/>
             </a:pPr>
             <a:r>
@@ -1907,7 +1654,7 @@
           <a:bodyPr wrap="square" lIns="0" tIns="0" rIns="0" bIns="0" rtlCol="0" anchor="ctr"/>
           <a:lstStyle/>
           <a:p>
-            <a:pPr indent="0" marL="0">
+            <a:pPr marL="0" indent="0">
               <a:buNone/>
             </a:pPr>
             <a:r>
@@ -1948,7 +1695,7 @@
           </a:bodyPr>
           <a:lstStyle/>
           <a:p>
-            <a:pPr indent="0" marL="0">
+            <a:pPr marL="0" indent="0">
               <a:buNone/>
             </a:pPr>
             <a:r>
@@ -1965,7 +1712,7 @@
             <a:endParaRPr lang="en-US" sz="980" dirty="0"/>
           </a:p>
           <a:p>
-            <a:pPr indent="0" marL="0">
+            <a:pPr marL="0" indent="0">
               <a:buNone/>
             </a:pPr>
             <a:r>
@@ -1982,7 +1729,7 @@
             <a:endParaRPr lang="en-US" sz="980" dirty="0"/>
           </a:p>
           <a:p>
-            <a:pPr indent="0" marL="0">
+            <a:pPr marL="0" indent="0">
               <a:buNone/>
             </a:pPr>
             <a:r>
@@ -1999,7 +1746,7 @@
             <a:endParaRPr lang="en-US" sz="980" dirty="0"/>
           </a:p>
           <a:p>
-            <a:pPr indent="0" marL="0">
+            <a:pPr marL="0" indent="0">
               <a:buNone/>
             </a:pPr>
             <a:r>
@@ -2069,14 +1816,14 @@
       </p:sp>
       <p:pic>
         <p:nvPicPr>
-          <p:cNvPr id="12" name="Image 0" descr="/mnt/data/proposal_media/image-8-4.png">    </p:cNvPr>
+          <p:cNvPr id="12" name="Image 0" descr="/mnt/data/proposal_media/image-8-4.png"/>
           <p:cNvPicPr>
             <a:picLocks noChangeAspect="1"/>
           </p:cNvPicPr>
           <p:nvPr/>
         </p:nvPicPr>
         <p:blipFill>
-          <a:blip r:embed="rId1"/>
+          <a:blip r:embed="rId3"/>
           <a:stretch>
             <a:fillRect/>
           </a:stretch>
@@ -2112,7 +1859,7 @@
           <a:bodyPr wrap="square" lIns="0" tIns="0" rIns="0" bIns="0" rtlCol="0" anchor="ctr"/>
           <a:lstStyle/>
           <a:p>
-            <a:pPr indent="0" marL="0">
+            <a:pPr marL="0" indent="0">
               <a:buNone/>
             </a:pPr>
             <a:r>
@@ -2151,7 +1898,7 @@
           <a:bodyPr wrap="square" lIns="0" tIns="0" rIns="0" bIns="0" rtlCol="0" anchor="ctr"/>
           <a:lstStyle/>
           <a:p>
-            <a:pPr algn="r" indent="0" marL="0">
+            <a:pPr marL="0" indent="0" algn="r">
               <a:buNone/>
             </a:pPr>
             <a:r>
@@ -2185,6 +1932,7 @@
         <a:solidFill>
           <a:srgbClr val="0B1F3A"/>
         </a:solidFill>
+        <a:effectLst/>
       </p:bgPr>
     </p:bg>
     <p:spTree>
@@ -2203,33 +1951,6 @@
       </p:grpSpPr>
       <p:sp>
         <p:nvSpPr>
-          <p:cNvPr id="2" name="Shape 0"/>
-          <p:cNvSpPr/>
-          <p:nvPr/>
-        </p:nvSpPr>
-        <p:spPr>
-          <a:xfrm>
-            <a:off x="0" y="0"/>
-            <a:ext cx="9144000" cy="5143500"/>
-          </a:xfrm>
-          <a:prstGeom prst="rect">
-            <a:avLst/>
-          </a:prstGeom>
-          <a:solidFill>
-            <a:srgbClr val="0B1F3A"/>
-          </a:solidFill>
-          <a:ln w="12700">
-            <a:solidFill>
-              <a:srgbClr val="333333">
-                <a:alpha val="0"/>
-              </a:srgbClr>
-            </a:solidFill>
-            <a:prstDash val="solid"/>
-          </a:ln>
-        </p:spPr>
-      </p:sp>
-      <p:sp>
-        <p:nvSpPr>
           <p:cNvPr id="3" name="Shape 1"/>
           <p:cNvSpPr/>
           <p:nvPr/>
@@ -2276,7 +1997,7 @@
           <a:bodyPr wrap="square" lIns="0" tIns="0" rIns="0" bIns="0" rtlCol="0" anchor="ctr"/>
           <a:lstStyle/>
           <a:p>
-            <a:pPr algn="ctr" indent="0" marL="0">
+            <a:pPr marL="0" indent="0" algn="ctr">
               <a:buNone/>
             </a:pPr>
             <a:r>
@@ -2291,84 +2012,6 @@
               <a:t>Thank You</a:t>
             </a:r>
             <a:endParaRPr lang="en-US" sz="3400" dirty="0"/>
-          </a:p>
-        </p:txBody>
-      </p:sp>
-      <p:sp>
-        <p:nvSpPr>
-          <p:cNvPr id="5" name="Text 3"/>
-          <p:cNvSpPr/>
-          <p:nvPr/>
-        </p:nvSpPr>
-        <p:spPr>
-          <a:xfrm>
-            <a:off x="502920" y="2139696"/>
-            <a:ext cx="8138160" cy="347472"/>
-          </a:xfrm>
-          <a:prstGeom prst="rect">
-            <a:avLst/>
-          </a:prstGeom>
-          <a:noFill/>
-          <a:ln/>
-        </p:spPr>
-        <p:txBody>
-          <a:bodyPr wrap="square" lIns="0" tIns="0" rIns="0" bIns="0" rtlCol="0" anchor="ctr"/>
-          <a:lstStyle/>
-          <a:p>
-            <a:pPr algn="ctr" indent="0" marL="0">
-              <a:buNone/>
-            </a:pPr>
-            <a:r>
-              <a:rPr lang="en-US" sz="1900" b="1" dirty="0">
-                <a:solidFill>
-                  <a:srgbClr val="D9FFF7"/>
-                </a:solidFill>
-                <a:latin typeface="Aptos Display" pitchFamily="34" charset="0"/>
-                <a:ea typeface="Aptos Display" pitchFamily="34" charset="-122"/>
-                <a:cs typeface="Aptos Display" pitchFamily="34" charset="-120"/>
-              </a:rPr>
-              <a:t>Questions &amp; Discussion</a:t>
-            </a:r>
-            <a:endParaRPr lang="en-US" sz="1900" dirty="0"/>
-          </a:p>
-        </p:txBody>
-      </p:sp>
-      <p:sp>
-        <p:nvSpPr>
-          <p:cNvPr id="6" name="Text 4"/>
-          <p:cNvSpPr/>
-          <p:nvPr/>
-        </p:nvSpPr>
-        <p:spPr>
-          <a:xfrm>
-            <a:off x="1143000" y="2926080"/>
-            <a:ext cx="6858000" cy="228600"/>
-          </a:xfrm>
-          <a:prstGeom prst="rect">
-            <a:avLst/>
-          </a:prstGeom>
-          <a:noFill/>
-          <a:ln/>
-        </p:spPr>
-        <p:txBody>
-          <a:bodyPr wrap="square" lIns="0" tIns="0" rIns="0" bIns="0" rtlCol="0" anchor="ctr"/>
-          <a:lstStyle/>
-          <a:p>
-            <a:pPr algn="ctr" indent="0" marL="0">
-              <a:buNone/>
-            </a:pPr>
-            <a:r>
-              <a:rPr lang="en-US" sz="1150" dirty="0">
-                <a:solidFill>
-                  <a:srgbClr val="FFFFFF"/>
-                </a:solidFill>
-                <a:latin typeface="Aptos" pitchFamily="34" charset="0"/>
-                <a:ea typeface="Aptos" pitchFamily="34" charset="-122"/>
-                <a:cs typeface="Aptos" pitchFamily="34" charset="-120"/>
-              </a:rPr>
-              <a:t>Ready to demonstrate: Django Admin product data → React Chatbot → Product-aware response</a:t>
-            </a:r>
-            <a:endParaRPr lang="en-US" sz="1150" dirty="0"/>
           </a:p>
         </p:txBody>
       </p:sp>
@@ -2399,14 +2042,14 @@
       </p:sp>
       <p:pic>
         <p:nvPicPr>
-          <p:cNvPr id="8" name="Image 0" descr="/mnt/data/proposal_media/image-8-4.png">    </p:cNvPr>
+          <p:cNvPr id="8" name="Image 0" descr="/mnt/data/proposal_media/image-8-4.png"/>
           <p:cNvPicPr>
             <a:picLocks noChangeAspect="1"/>
           </p:cNvPicPr>
           <p:nvPr/>
         </p:nvPicPr>
         <p:blipFill>
-          <a:blip r:embed="rId1"/>
+          <a:blip r:embed="rId3"/>
           <a:stretch>
             <a:fillRect/>
           </a:stretch>
@@ -2442,7 +2085,7 @@
           <a:bodyPr wrap="square" lIns="0" tIns="0" rIns="0" bIns="0" rtlCol="0" anchor="ctr"/>
           <a:lstStyle/>
           <a:p>
-            <a:pPr algn="ctr" indent="0" marL="0">
+            <a:pPr marL="0" indent="0" algn="ctr">
               <a:buNone/>
             </a:pPr>
             <a:r>
@@ -2481,7 +2124,7 @@
           <a:bodyPr wrap="square" lIns="0" tIns="0" rIns="0" bIns="0" rtlCol="0" anchor="ctr"/>
           <a:lstStyle/>
           <a:p>
-            <a:pPr indent="0" marL="0">
+            <a:pPr marL="0" indent="0">
               <a:buNone/>
             </a:pPr>
             <a:r>
@@ -2520,7 +2163,7 @@
           <a:bodyPr wrap="square" lIns="0" tIns="0" rIns="0" bIns="0" rtlCol="0" anchor="ctr"/>
           <a:lstStyle/>
           <a:p>
-            <a:pPr algn="r" indent="0" marL="0">
+            <a:pPr marL="0" indent="0" algn="r">
               <a:buNone/>
             </a:pPr>
             <a:r>
@@ -2554,6 +2197,7 @@
         <a:solidFill>
           <a:srgbClr val="FFFFFF"/>
         </a:solidFill>
+        <a:effectLst/>
       </p:bgPr>
     </p:bg>
     <p:spTree>
@@ -2591,7 +2235,7 @@
           <a:bodyPr wrap="square" lIns="0" tIns="0" rIns="0" bIns="0" rtlCol="0" anchor="ctr"/>
           <a:lstStyle/>
           <a:p>
-            <a:pPr indent="0" marL="0">
+            <a:pPr marL="0" indent="0">
               <a:buNone/>
             </a:pPr>
             <a:r>
@@ -2630,7 +2274,7 @@
           <a:bodyPr wrap="square" lIns="0" tIns="0" rIns="0" bIns="0" rtlCol="0" anchor="ctr"/>
           <a:lstStyle/>
           <a:p>
-            <a:pPr indent="0" marL="0">
+            <a:pPr marL="0" indent="0">
               <a:buNone/>
             </a:pPr>
             <a:r>
@@ -2719,7 +2363,7 @@
           <a:bodyPr wrap="square" lIns="0" tIns="0" rIns="0" bIns="0" rtlCol="0" anchor="ctr"/>
           <a:lstStyle/>
           <a:p>
-            <a:pPr indent="0" marL="0">
+            <a:pPr marL="0" indent="0">
               <a:buNone/>
             </a:pPr>
             <a:r>
@@ -2758,7 +2402,7 @@
           <a:bodyPr wrap="square" lIns="0" tIns="0" rIns="0" bIns="0" rtlCol="0" anchor="ctr"/>
           <a:lstStyle/>
           <a:p>
-            <a:pPr algn="r" indent="0" marL="0">
+            <a:pPr marL="0" indent="0" algn="r">
               <a:buNone/>
             </a:pPr>
             <a:r>
@@ -2799,7 +2443,7 @@
           </a:bodyPr>
           <a:lstStyle/>
           <a:p>
-            <a:pPr indent="0" marL="0">
+            <a:pPr marL="0" indent="0">
               <a:buNone/>
             </a:pPr>
             <a:r>
@@ -2873,14 +2517,14 @@
       </p:sp>
       <p:pic>
         <p:nvPicPr>
-          <p:cNvPr id="11" name="Image 0" descr="/mnt/data/proposal_media/image-3-1.png">    </p:cNvPr>
+          <p:cNvPr id="11" name="Image 0" descr="/mnt/data/proposal_media/image-3-1.png"/>
           <p:cNvPicPr>
             <a:picLocks noChangeAspect="1"/>
           </p:cNvPicPr>
           <p:nvPr/>
         </p:nvPicPr>
         <p:blipFill>
-          <a:blip r:embed="rId1"/>
+          <a:blip r:embed="rId3"/>
           <a:stretch>
             <a:fillRect/>
           </a:stretch>
@@ -2916,7 +2560,7 @@
           <a:bodyPr wrap="square" lIns="0" tIns="0" rIns="0" bIns="0" rtlCol="0" anchor="ctr"/>
           <a:lstStyle/>
           <a:p>
-            <a:pPr indent="0" marL="0">
+            <a:pPr marL="0" indent="0">
               <a:buNone/>
             </a:pPr>
             <a:r>
@@ -2957,7 +2601,7 @@
           </a:bodyPr>
           <a:lstStyle/>
           <a:p>
-            <a:pPr indent="0" marL="0">
+            <a:pPr marL="0" indent="0">
               <a:buNone/>
             </a:pPr>
             <a:r>
@@ -3031,14 +2675,14 @@
       </p:sp>
       <p:pic>
         <p:nvPicPr>
-          <p:cNvPr id="16" name="Image 1" descr="/mnt/data/proposal_media/image-3-4.png">    </p:cNvPr>
+          <p:cNvPr id="16" name="Image 1" descr="/mnt/data/proposal_media/image-3-4.png"/>
           <p:cNvPicPr>
             <a:picLocks noChangeAspect="1"/>
           </p:cNvPicPr>
           <p:nvPr/>
         </p:nvPicPr>
         <p:blipFill>
-          <a:blip r:embed="rId2"/>
+          <a:blip r:embed="rId4"/>
           <a:stretch>
             <a:fillRect/>
           </a:stretch>
@@ -3074,7 +2718,7 @@
           <a:bodyPr wrap="square" lIns="0" tIns="0" rIns="0" bIns="0" rtlCol="0" anchor="ctr"/>
           <a:lstStyle/>
           <a:p>
-            <a:pPr indent="0" marL="0">
+            <a:pPr marL="0" indent="0">
               <a:buNone/>
             </a:pPr>
             <a:r>
@@ -3115,7 +2759,7 @@
           </a:bodyPr>
           <a:lstStyle/>
           <a:p>
-            <a:pPr indent="0" marL="0">
+            <a:pPr marL="0" indent="0">
               <a:buNone/>
             </a:pPr>
             <a:r>
@@ -3189,14 +2833,14 @@
       </p:sp>
       <p:pic>
         <p:nvPicPr>
-          <p:cNvPr id="21" name="Image 2" descr="/mnt/data/proposal_media/image-7-3.png">    </p:cNvPr>
+          <p:cNvPr id="21" name="Image 2" descr="/mnt/data/proposal_media/image-7-3.png"/>
           <p:cNvPicPr>
             <a:picLocks noChangeAspect="1"/>
           </p:cNvPicPr>
           <p:nvPr/>
         </p:nvPicPr>
         <p:blipFill>
-          <a:blip r:embed="rId3"/>
+          <a:blip r:embed="rId5"/>
           <a:stretch>
             <a:fillRect/>
           </a:stretch>
@@ -3232,7 +2876,7 @@
           <a:bodyPr wrap="square" lIns="0" tIns="0" rIns="0" bIns="0" rtlCol="0" anchor="ctr"/>
           <a:lstStyle/>
           <a:p>
-            <a:pPr indent="0" marL="0">
+            <a:pPr marL="0" indent="0">
               <a:buNone/>
             </a:pPr>
             <a:r>
@@ -3273,7 +2917,7 @@
           </a:bodyPr>
           <a:lstStyle/>
           <a:p>
-            <a:pPr indent="0" marL="0">
+            <a:pPr marL="0" indent="0">
               <a:buNone/>
             </a:pPr>
             <a:r>
@@ -3312,7 +2956,7 @@
           <a:bodyPr wrap="square" lIns="0" tIns="0" rIns="0" bIns="0" rtlCol="0" anchor="ctr"/>
           <a:lstStyle/>
           <a:p>
-            <a:pPr algn="ctr" indent="0" marL="0">
+            <a:pPr marL="0" indent="0" algn="ctr">
               <a:buNone/>
             </a:pPr>
             <a:r>
@@ -3346,6 +2990,7 @@
         <a:solidFill>
           <a:srgbClr val="FFFFFF"/>
         </a:solidFill>
+        <a:effectLst/>
       </p:bgPr>
     </p:bg>
     <p:spTree>
@@ -3383,7 +3028,7 @@
           <a:bodyPr wrap="square" lIns="0" tIns="0" rIns="0" bIns="0" rtlCol="0" anchor="ctr"/>
           <a:lstStyle/>
           <a:p>
-            <a:pPr indent="0" marL="0">
+            <a:pPr marL="0" indent="0">
               <a:buNone/>
             </a:pPr>
             <a:r>
@@ -3422,7 +3067,7 @@
           <a:bodyPr wrap="square" lIns="0" tIns="0" rIns="0" bIns="0" rtlCol="0" anchor="ctr"/>
           <a:lstStyle/>
           <a:p>
-            <a:pPr indent="0" marL="0">
+            <a:pPr marL="0" indent="0">
               <a:buNone/>
             </a:pPr>
             <a:r>
@@ -3511,7 +3156,7 @@
           <a:bodyPr wrap="square" lIns="0" tIns="0" rIns="0" bIns="0" rtlCol="0" anchor="ctr"/>
           <a:lstStyle/>
           <a:p>
-            <a:pPr indent="0" marL="0">
+            <a:pPr marL="0" indent="0">
               <a:buNone/>
             </a:pPr>
             <a:r>
@@ -3550,7 +3195,7 @@
           <a:bodyPr wrap="square" lIns="0" tIns="0" rIns="0" bIns="0" rtlCol="0" anchor="ctr"/>
           <a:lstStyle/>
           <a:p>
-            <a:pPr algn="r" indent="0" marL="0">
+            <a:pPr marL="0" indent="0" algn="r">
               <a:buNone/>
             </a:pPr>
             <a:r>
@@ -3589,7 +3234,7 @@
           <a:bodyPr wrap="square" lIns="254" tIns="254" rIns="254" bIns="254" rtlCol="0" anchor="ctr"/>
           <a:lstStyle/>
           <a:p>
-            <a:pPr indent="0" marL="0">
+            <a:pPr marL="0" indent="0">
               <a:buNone/>
             </a:pPr>
             <a:r>
@@ -3655,7 +3300,7 @@
           <a:bodyPr wrap="square" lIns="0" tIns="0" rIns="0" bIns="0" rtlCol="0" anchor="ctr"/>
           <a:lstStyle/>
           <a:p>
-            <a:pPr indent="0" marL="0">
+            <a:pPr marL="0" indent="0">
               <a:buNone/>
             </a:pPr>
             <a:r>
@@ -3696,7 +3341,7 @@
           </a:bodyPr>
           <a:lstStyle/>
           <a:p>
-            <a:pPr indent="0" marL="0">
+            <a:pPr marL="0" indent="0">
               <a:buNone/>
             </a:pPr>
             <a:r>
@@ -3713,7 +3358,7 @@
             <a:endParaRPr lang="en-US" sz="810" dirty="0"/>
           </a:p>
           <a:p>
-            <a:pPr indent="0" marL="0">
+            <a:pPr marL="0" indent="0">
               <a:buNone/>
             </a:pPr>
             <a:r>
@@ -3730,7 +3375,7 @@
             <a:endParaRPr lang="en-US" sz="810" dirty="0"/>
           </a:p>
           <a:p>
-            <a:pPr indent="0" marL="0">
+            <a:pPr marL="0" indent="0">
               <a:buNone/>
             </a:pPr>
             <a:r>
@@ -3747,7 +3392,7 @@
             <a:endParaRPr lang="en-US" sz="810" dirty="0"/>
           </a:p>
           <a:p>
-            <a:pPr indent="0" marL="0">
+            <a:pPr marL="0" indent="0">
               <a:buNone/>
             </a:pPr>
             <a:r>
@@ -3764,7 +3409,7 @@
             <a:endParaRPr lang="en-US" sz="810" dirty="0"/>
           </a:p>
           <a:p>
-            <a:pPr indent="0" marL="0">
+            <a:pPr marL="0" indent="0">
               <a:buNone/>
             </a:pPr>
             <a:r>
@@ -3830,7 +3475,7 @@
           <a:bodyPr wrap="square" lIns="0" tIns="0" rIns="0" bIns="0" rtlCol="0" anchor="ctr"/>
           <a:lstStyle/>
           <a:p>
-            <a:pPr indent="0" marL="0">
+            <a:pPr marL="0" indent="0">
               <a:buNone/>
             </a:pPr>
             <a:r>
@@ -3871,7 +3516,7 @@
           </a:bodyPr>
           <a:lstStyle/>
           <a:p>
-            <a:pPr indent="0" marL="0">
+            <a:pPr marL="0" indent="0">
               <a:buNone/>
             </a:pPr>
             <a:r>
@@ -3888,7 +3533,7 @@
             <a:endParaRPr lang="en-US" sz="810" dirty="0"/>
           </a:p>
           <a:p>
-            <a:pPr indent="0" marL="0">
+            <a:pPr marL="0" indent="0">
               <a:buNone/>
             </a:pPr>
             <a:r>
@@ -3905,7 +3550,7 @@
             <a:endParaRPr lang="en-US" sz="810" dirty="0"/>
           </a:p>
           <a:p>
-            <a:pPr indent="0" marL="0">
+            <a:pPr marL="0" indent="0">
               <a:buNone/>
             </a:pPr>
             <a:r>
@@ -3922,7 +3567,7 @@
             <a:endParaRPr lang="en-US" sz="810" dirty="0"/>
           </a:p>
           <a:p>
-            <a:pPr indent="0" marL="0">
+            <a:pPr marL="0" indent="0">
               <a:buNone/>
             </a:pPr>
             <a:r>
@@ -3956,6 +3601,7 @@
         <a:solidFill>
           <a:srgbClr val="FFFFFF"/>
         </a:solidFill>
+        <a:effectLst/>
       </p:bgPr>
     </p:bg>
     <p:spTree>
@@ -3993,7 +3639,7 @@
           <a:bodyPr wrap="square" lIns="0" tIns="0" rIns="0" bIns="0" rtlCol="0" anchor="ctr"/>
           <a:lstStyle/>
           <a:p>
-            <a:pPr indent="0" marL="0">
+            <a:pPr marL="0" indent="0">
               <a:buNone/>
             </a:pPr>
             <a:r>
@@ -4032,7 +3678,7 @@
           <a:bodyPr wrap="square" lIns="0" tIns="0" rIns="0" bIns="0" rtlCol="0" anchor="ctr"/>
           <a:lstStyle/>
           <a:p>
-            <a:pPr indent="0" marL="0">
+            <a:pPr marL="0" indent="0">
               <a:buNone/>
             </a:pPr>
             <a:r>
@@ -4121,7 +3767,7 @@
           <a:bodyPr wrap="square" lIns="0" tIns="0" rIns="0" bIns="0" rtlCol="0" anchor="ctr"/>
           <a:lstStyle/>
           <a:p>
-            <a:pPr indent="0" marL="0">
+            <a:pPr marL="0" indent="0">
               <a:buNone/>
             </a:pPr>
             <a:r>
@@ -4160,7 +3806,7 @@
           <a:bodyPr wrap="square" lIns="0" tIns="0" rIns="0" bIns="0" rtlCol="0" anchor="ctr"/>
           <a:lstStyle/>
           <a:p>
-            <a:pPr algn="r" indent="0" marL="0">
+            <a:pPr marL="0" indent="0" algn="r">
               <a:buNone/>
             </a:pPr>
             <a:r>
@@ -4199,7 +3845,7 @@
           <a:bodyPr wrap="square" lIns="254" tIns="254" rIns="254" bIns="254" rtlCol="0" anchor="ctr"/>
           <a:lstStyle/>
           <a:p>
-            <a:pPr indent="0" marL="0">
+            <a:pPr marL="0" indent="0">
               <a:buNone/>
             </a:pPr>
             <a:r>
@@ -4267,7 +3913,7 @@
           <a:bodyPr wrap="square" lIns="0" tIns="0" rIns="0" bIns="0" rtlCol="0" anchor="ctr"/>
           <a:lstStyle/>
           <a:p>
-            <a:pPr algn="ctr" indent="0" marL="0">
+            <a:pPr marL="0" indent="0" algn="ctr">
               <a:buNone/>
             </a:pPr>
             <a:r>
@@ -4308,7 +3954,7 @@
           </a:bodyPr>
           <a:lstStyle/>
           <a:p>
-            <a:pPr indent="0" marL="0">
+            <a:pPr marL="0" indent="0">
               <a:buNone/>
             </a:pPr>
             <a:r>
@@ -4376,7 +4022,7 @@
           <a:bodyPr wrap="square" lIns="0" tIns="0" rIns="0" bIns="0" rtlCol="0" anchor="ctr"/>
           <a:lstStyle/>
           <a:p>
-            <a:pPr algn="ctr" indent="0" marL="0">
+            <a:pPr marL="0" indent="0" algn="ctr">
               <a:buNone/>
             </a:pPr>
             <a:r>
@@ -4417,7 +4063,7 @@
           </a:bodyPr>
           <a:lstStyle/>
           <a:p>
-            <a:pPr indent="0" marL="0">
+            <a:pPr marL="0" indent="0">
               <a:buNone/>
             </a:pPr>
             <a:r>
@@ -4485,7 +4131,7 @@
           <a:bodyPr wrap="square" lIns="0" tIns="0" rIns="0" bIns="0" rtlCol="0" anchor="ctr"/>
           <a:lstStyle/>
           <a:p>
-            <a:pPr algn="ctr" indent="0" marL="0">
+            <a:pPr marL="0" indent="0" algn="ctr">
               <a:buNone/>
             </a:pPr>
             <a:r>
@@ -4526,7 +4172,7 @@
           </a:bodyPr>
           <a:lstStyle/>
           <a:p>
-            <a:pPr indent="0" marL="0">
+            <a:pPr marL="0" indent="0">
               <a:buNone/>
             </a:pPr>
             <a:r>
@@ -4594,7 +4240,7 @@
           <a:bodyPr wrap="square" lIns="0" tIns="0" rIns="0" bIns="0" rtlCol="0" anchor="ctr"/>
           <a:lstStyle/>
           <a:p>
-            <a:pPr algn="ctr" indent="0" marL="0">
+            <a:pPr marL="0" indent="0" algn="ctr">
               <a:buNone/>
             </a:pPr>
             <a:r>
@@ -4635,7 +4281,7 @@
           </a:bodyPr>
           <a:lstStyle/>
           <a:p>
-            <a:pPr indent="0" marL="0">
+            <a:pPr marL="0" indent="0">
               <a:buNone/>
             </a:pPr>
             <a:r>
@@ -4703,7 +4349,7 @@
           <a:bodyPr wrap="square" lIns="0" tIns="0" rIns="0" bIns="0" rtlCol="0" anchor="ctr"/>
           <a:lstStyle/>
           <a:p>
-            <a:pPr algn="ctr" indent="0" marL="0">
+            <a:pPr marL="0" indent="0" algn="ctr">
               <a:buNone/>
             </a:pPr>
             <a:r>
@@ -4744,7 +4390,7 @@
           </a:bodyPr>
           <a:lstStyle/>
           <a:p>
-            <a:pPr indent="0" marL="0">
+            <a:pPr marL="0" indent="0">
               <a:buNone/>
             </a:pPr>
             <a:r>
@@ -4810,7 +4456,7 @@
           <a:bodyPr wrap="square" lIns="0" tIns="0" rIns="0" bIns="0" rtlCol="0" anchor="ctr"/>
           <a:lstStyle/>
           <a:p>
-            <a:pPr indent="0" marL="0">
+            <a:pPr marL="0" indent="0">
               <a:buNone/>
             </a:pPr>
             <a:r>
@@ -4844,6 +4490,7 @@
         <a:solidFill>
           <a:srgbClr val="FFFFFF"/>
         </a:solidFill>
+        <a:effectLst/>
       </p:bgPr>
     </p:bg>
     <p:spTree>
@@ -4881,7 +4528,7 @@
           <a:bodyPr wrap="square" lIns="0" tIns="0" rIns="0" bIns="0" rtlCol="0" anchor="ctr"/>
           <a:lstStyle/>
           <a:p>
-            <a:pPr indent="0" marL="0">
+            <a:pPr marL="0" indent="0">
               <a:buNone/>
             </a:pPr>
             <a:r>
@@ -4920,7 +4567,7 @@
           <a:bodyPr wrap="square" lIns="0" tIns="0" rIns="0" bIns="0" rtlCol="0" anchor="ctr"/>
           <a:lstStyle/>
           <a:p>
-            <a:pPr indent="0" marL="0">
+            <a:pPr marL="0" indent="0">
               <a:buNone/>
             </a:pPr>
             <a:r>
@@ -5009,7 +4656,7 @@
           <a:bodyPr wrap="square" lIns="0" tIns="0" rIns="0" bIns="0" rtlCol="0" anchor="ctr"/>
           <a:lstStyle/>
           <a:p>
-            <a:pPr indent="0" marL="0">
+            <a:pPr marL="0" indent="0">
               <a:buNone/>
             </a:pPr>
             <a:r>
@@ -5048,7 +4695,7 @@
           <a:bodyPr wrap="square" lIns="0" tIns="0" rIns="0" bIns="0" rtlCol="0" anchor="ctr"/>
           <a:lstStyle/>
           <a:p>
-            <a:pPr algn="r" indent="0" marL="0">
+            <a:pPr marL="0" indent="0" algn="r">
               <a:buNone/>
             </a:pPr>
             <a:r>
@@ -5087,7 +4734,7 @@
           <a:bodyPr wrap="square" lIns="254" tIns="254" rIns="254" bIns="254" rtlCol="0" anchor="ctr"/>
           <a:lstStyle/>
           <a:p>
-            <a:pPr indent="0" marL="0">
+            <a:pPr marL="0" indent="0">
               <a:buNone/>
             </a:pPr>
             <a:r>
@@ -5161,14 +4808,14 @@
       </p:sp>
       <p:pic>
         <p:nvPicPr>
-          <p:cNvPr id="11" name="Image 0" descr="/mnt/data/proposal_media/image-7-3.png">    </p:cNvPr>
+          <p:cNvPr id="11" name="Image 0" descr="/mnt/data/proposal_media/image-7-3.png"/>
           <p:cNvPicPr>
             <a:picLocks noChangeAspect="1"/>
           </p:cNvPicPr>
           <p:nvPr/>
         </p:nvPicPr>
         <p:blipFill>
-          <a:blip r:embed="rId1"/>
+          <a:blip r:embed="rId3"/>
           <a:stretch>
             <a:fillRect/>
           </a:stretch>
@@ -5204,7 +4851,7 @@
           <a:bodyPr wrap="square" lIns="0" tIns="0" rIns="0" bIns="0" rtlCol="0" anchor="ctr"/>
           <a:lstStyle/>
           <a:p>
-            <a:pPr indent="0" marL="0">
+            <a:pPr marL="0" indent="0">
               <a:buNone/>
             </a:pPr>
             <a:r>
@@ -5245,7 +4892,7 @@
           </a:bodyPr>
           <a:lstStyle/>
           <a:p>
-            <a:pPr indent="0" marL="0">
+            <a:pPr marL="0" indent="0">
               <a:buNone/>
             </a:pPr>
             <a:r>
@@ -5319,14 +4966,14 @@
       </p:sp>
       <p:pic>
         <p:nvPicPr>
-          <p:cNvPr id="16" name="Image 1" descr="/mnt/data/proposal_media/image-2-2.png">    </p:cNvPr>
+          <p:cNvPr id="16" name="Image 1" descr="/mnt/data/proposal_media/image-2-2.png"/>
           <p:cNvPicPr>
             <a:picLocks noChangeAspect="1"/>
           </p:cNvPicPr>
           <p:nvPr/>
         </p:nvPicPr>
         <p:blipFill>
-          <a:blip r:embed="rId2"/>
+          <a:blip r:embed="rId4"/>
           <a:stretch>
             <a:fillRect/>
           </a:stretch>
@@ -5362,7 +5009,7 @@
           <a:bodyPr wrap="square" lIns="0" tIns="0" rIns="0" bIns="0" rtlCol="0" anchor="ctr"/>
           <a:lstStyle/>
           <a:p>
-            <a:pPr indent="0" marL="0">
+            <a:pPr marL="0" indent="0">
               <a:buNone/>
             </a:pPr>
             <a:r>
@@ -5403,7 +5050,7 @@
           </a:bodyPr>
           <a:lstStyle/>
           <a:p>
-            <a:pPr indent="0" marL="0">
+            <a:pPr marL="0" indent="0">
               <a:buNone/>
             </a:pPr>
             <a:r>
@@ -5477,14 +5124,14 @@
       </p:sp>
       <p:pic>
         <p:nvPicPr>
-          <p:cNvPr id="21" name="Image 2" descr="/mnt/data/proposal_media/image-8-1.png">    </p:cNvPr>
+          <p:cNvPr id="21" name="Image 2" descr="/mnt/data/proposal_media/image-8-1.png"/>
           <p:cNvPicPr>
             <a:picLocks noChangeAspect="1"/>
           </p:cNvPicPr>
           <p:nvPr/>
         </p:nvPicPr>
         <p:blipFill>
-          <a:blip r:embed="rId3"/>
+          <a:blip r:embed="rId5"/>
           <a:stretch>
             <a:fillRect/>
           </a:stretch>
@@ -5520,7 +5167,7 @@
           <a:bodyPr wrap="square" lIns="0" tIns="0" rIns="0" bIns="0" rtlCol="0" anchor="ctr"/>
           <a:lstStyle/>
           <a:p>
-            <a:pPr indent="0" marL="0">
+            <a:pPr marL="0" indent="0">
               <a:buNone/>
             </a:pPr>
             <a:r>
@@ -5561,7 +5208,7 @@
           </a:bodyPr>
           <a:lstStyle/>
           <a:p>
-            <a:pPr indent="0" marL="0">
+            <a:pPr marL="0" indent="0">
               <a:buNone/>
             </a:pPr>
             <a:r>
@@ -5600,7 +5247,7 @@
           <a:bodyPr wrap="square" lIns="0" tIns="0" rIns="0" bIns="0" rtlCol="0" anchor="ctr"/>
           <a:lstStyle/>
           <a:p>
-            <a:pPr algn="ctr" indent="0" marL="0">
+            <a:pPr marL="0" indent="0" algn="ctr">
               <a:buNone/>
             </a:pPr>
             <a:r>
@@ -5634,6 +5281,7 @@
         <a:solidFill>
           <a:srgbClr val="FFFFFF"/>
         </a:solidFill>
+        <a:effectLst/>
       </p:bgPr>
     </p:bg>
     <p:spTree>
@@ -5671,7 +5319,7 @@
           <a:bodyPr wrap="square" lIns="0" tIns="0" rIns="0" bIns="0" rtlCol="0" anchor="ctr"/>
           <a:lstStyle/>
           <a:p>
-            <a:pPr indent="0" marL="0">
+            <a:pPr marL="0" indent="0">
               <a:buNone/>
             </a:pPr>
             <a:r>
@@ -5710,7 +5358,7 @@
           <a:bodyPr wrap="square" lIns="0" tIns="0" rIns="0" bIns="0" rtlCol="0" anchor="ctr"/>
           <a:lstStyle/>
           <a:p>
-            <a:pPr indent="0" marL="0">
+            <a:pPr marL="0" indent="0">
               <a:buNone/>
             </a:pPr>
             <a:r>
@@ -5799,7 +5447,7 @@
           <a:bodyPr wrap="square" lIns="0" tIns="0" rIns="0" bIns="0" rtlCol="0" anchor="ctr"/>
           <a:lstStyle/>
           <a:p>
-            <a:pPr indent="0" marL="0">
+            <a:pPr marL="0" indent="0">
               <a:buNone/>
             </a:pPr>
             <a:r>
@@ -5838,7 +5486,7 @@
           <a:bodyPr wrap="square" lIns="0" tIns="0" rIns="0" bIns="0" rtlCol="0" anchor="ctr"/>
           <a:lstStyle/>
           <a:p>
-            <a:pPr algn="r" indent="0" marL="0">
+            <a:pPr marL="0" indent="0" algn="r">
               <a:buNone/>
             </a:pPr>
             <a:r>
@@ -5877,7 +5525,7 @@
           <a:bodyPr wrap="square" lIns="254" tIns="254" rIns="254" bIns="254" rtlCol="0" anchor="ctr"/>
           <a:lstStyle/>
           <a:p>
-            <a:pPr indent="0" marL="0">
+            <a:pPr marL="0" indent="0">
               <a:buNone/>
             </a:pPr>
             <a:r>
@@ -5943,7 +5591,7 @@
           <a:bodyPr wrap="square" lIns="0" tIns="0" rIns="0" bIns="0" rtlCol="0" anchor="ctr"/>
           <a:lstStyle/>
           <a:p>
-            <a:pPr indent="0" marL="0">
+            <a:pPr marL="0" indent="0">
               <a:buNone/>
             </a:pPr>
             <a:r>
@@ -5980,15 +5628,15 @@
         </p:spPr>
         <p:txBody>
           <a:bodyPr wrap="square" lIns="254" tIns="254" rIns="254" bIns="254" rtlCol="0" anchor="ctr">
-            <a:normAutofit/>
+            <a:normAutofit fontScale="92500" lnSpcReduction="10000"/>
           </a:bodyPr>
           <a:lstStyle/>
           <a:p>
-            <a:pPr indent="0" marL="0">
-              <a:buNone/>
-            </a:pPr>
-            <a:r>
-              <a:rPr lang="en-US" sz="830" dirty="0">
+            <a:pPr marL="0" indent="0">
+              <a:buNone/>
+            </a:pPr>
+            <a:r>
+              <a:rPr lang="en-US" sz="1200" dirty="0">
                 <a:solidFill>
                   <a:srgbClr val="142033"/>
                 </a:solidFill>
@@ -5998,14 +5646,14 @@
               </a:rPr>
               <a:t>backend/urls.py contains:</a:t>
             </a:r>
-            <a:endParaRPr lang="en-US" sz="830" dirty="0"/>
-          </a:p>
-          <a:p>
-            <a:pPr indent="0" marL="0">
-              <a:buNone/>
-            </a:pPr>
-            <a:r>
-              <a:rPr lang="en-US" sz="830" dirty="0">
+            <a:endParaRPr lang="en-US" sz="1200" dirty="0"/>
+          </a:p>
+          <a:p>
+            <a:pPr marL="0" indent="0">
+              <a:buNone/>
+            </a:pPr>
+            <a:r>
+              <a:rPr lang="en-US" sz="1200" dirty="0">
                 <a:solidFill>
                   <a:srgbClr val="142033"/>
                 </a:solidFill>
@@ -6015,20 +5663,20 @@
               </a:rPr>
               <a:t>path("admin/", admin.site.urls)</a:t>
             </a:r>
-            <a:endParaRPr lang="en-US" sz="830" dirty="0"/>
-          </a:p>
-          <a:p>
-            <a:pPr indent="0" marL="0">
-              <a:buNone/>
-            </a:pPr>
-            <a:endParaRPr lang="en-US" sz="830" dirty="0"/>
-          </a:p>
-          <a:p>
-            <a:pPr indent="0" marL="0">
-              <a:buNone/>
-            </a:pPr>
-            <a:r>
-              <a:rPr lang="en-US" sz="830" dirty="0">
+            <a:endParaRPr lang="en-US" sz="1200" dirty="0"/>
+          </a:p>
+          <a:p>
+            <a:pPr marL="0" indent="0">
+              <a:buNone/>
+            </a:pPr>
+            <a:endParaRPr lang="en-US" sz="1200" dirty="0"/>
+          </a:p>
+          <a:p>
+            <a:pPr marL="0" indent="0">
+              <a:buNone/>
+            </a:pPr>
+            <a:r>
+              <a:rPr lang="en-US" sz="1200" dirty="0">
                 <a:solidFill>
                   <a:srgbClr val="142033"/>
                 </a:solidFill>
@@ -6038,14 +5686,14 @@
               </a:rPr>
               <a:t>Django server starts at:</a:t>
             </a:r>
-            <a:endParaRPr lang="en-US" sz="830" dirty="0"/>
-          </a:p>
-          <a:p>
-            <a:pPr indent="0" marL="0">
-              <a:buNone/>
-            </a:pPr>
-            <a:r>
-              <a:rPr lang="en-US" sz="830" dirty="0">
+            <a:endParaRPr lang="en-US" sz="1200" dirty="0"/>
+          </a:p>
+          <a:p>
+            <a:pPr marL="0" indent="0">
+              <a:buNone/>
+            </a:pPr>
+            <a:r>
+              <a:rPr lang="en-US" sz="1200" dirty="0">
                 <a:solidFill>
                   <a:srgbClr val="142033"/>
                 </a:solidFill>
@@ -6055,20 +5703,20 @@
               </a:rPr>
               <a:t>http://127.0.0.1:8000/</a:t>
             </a:r>
-            <a:endParaRPr lang="en-US" sz="830" dirty="0"/>
-          </a:p>
-          <a:p>
-            <a:pPr indent="0" marL="0">
-              <a:buNone/>
-            </a:pPr>
-            <a:endParaRPr lang="en-US" sz="830" dirty="0"/>
-          </a:p>
-          <a:p>
-            <a:pPr indent="0" marL="0">
-              <a:buNone/>
-            </a:pPr>
-            <a:r>
-              <a:rPr lang="en-US" sz="830" dirty="0">
+            <a:endParaRPr lang="en-US" sz="1200" dirty="0"/>
+          </a:p>
+          <a:p>
+            <a:pPr marL="0" indent="0">
+              <a:buNone/>
+            </a:pPr>
+            <a:endParaRPr lang="en-US" sz="1200" dirty="0"/>
+          </a:p>
+          <a:p>
+            <a:pPr marL="0" indent="0">
+              <a:buNone/>
+            </a:pPr>
+            <a:r>
+              <a:rPr lang="en-US" sz="1200" dirty="0">
                 <a:solidFill>
                   <a:srgbClr val="142033"/>
                 </a:solidFill>
@@ -6078,14 +5726,14 @@
               </a:rPr>
               <a:t>Final admin link:</a:t>
             </a:r>
-            <a:endParaRPr lang="en-US" sz="830" dirty="0"/>
-          </a:p>
-          <a:p>
-            <a:pPr indent="0" marL="0">
-              <a:buNone/>
-            </a:pPr>
-            <a:r>
-              <a:rPr lang="en-US" sz="830" dirty="0">
+            <a:endParaRPr lang="en-US" sz="1200" dirty="0"/>
+          </a:p>
+          <a:p>
+            <a:pPr marL="0" indent="0">
+              <a:buNone/>
+            </a:pPr>
+            <a:r>
+              <a:rPr lang="en-US" sz="1200" dirty="0">
                 <a:solidFill>
                   <a:srgbClr val="142033"/>
                 </a:solidFill>
@@ -6095,7 +5743,7 @@
               </a:rPr>
               <a:t>http://127.0.0.1:8000/admin/</a:t>
             </a:r>
-            <a:endParaRPr lang="en-US" sz="830" dirty="0"/>
+            <a:endParaRPr lang="en-US" sz="1200" dirty="0"/>
           </a:p>
         </p:txBody>
       </p:sp>
@@ -6147,7 +5795,7 @@
           <a:bodyPr wrap="square" lIns="0" tIns="0" rIns="0" bIns="0" rtlCol="0" anchor="ctr"/>
           <a:lstStyle/>
           <a:p>
-            <a:pPr indent="0" marL="0">
+            <a:pPr marL="0" indent="0">
               <a:buNone/>
             </a:pPr>
             <a:r>
@@ -6188,11 +5836,11 @@
           </a:bodyPr>
           <a:lstStyle/>
           <a:p>
-            <a:pPr indent="0" marL="0">
-              <a:buNone/>
-            </a:pPr>
-            <a:r>
-              <a:rPr lang="en-US" sz="820" dirty="0">
+            <a:pPr marL="0" indent="0">
+              <a:buNone/>
+            </a:pPr>
+            <a:r>
+              <a:rPr lang="en-US" sz="1100" dirty="0">
                 <a:solidFill>
                   <a:srgbClr val="142033"/>
                 </a:solidFill>
@@ -6202,14 +5850,14 @@
               </a:rPr>
               <a:t>▸  Wireless Mouse — Tk 1200, stock 10</a:t>
             </a:r>
-            <a:endParaRPr lang="en-US" sz="820" dirty="0"/>
-          </a:p>
-          <a:p>
-            <a:pPr indent="0" marL="0">
-              <a:buNone/>
-            </a:pPr>
-            <a:r>
-              <a:rPr lang="en-US" sz="820" dirty="0">
+            <a:endParaRPr lang="en-US" sz="1100" dirty="0"/>
+          </a:p>
+          <a:p>
+            <a:pPr marL="0" indent="0">
+              <a:buNone/>
+            </a:pPr>
+            <a:r>
+              <a:rPr lang="en-US" sz="1100" dirty="0">
                 <a:solidFill>
                   <a:srgbClr val="142033"/>
                 </a:solidFill>
@@ -6219,14 +5867,14 @@
               </a:rPr>
               <a:t>▸  Laptop Stand — Tk 1500, stock 12</a:t>
             </a:r>
-            <a:endParaRPr lang="en-US" sz="820" dirty="0"/>
-          </a:p>
-          <a:p>
-            <a:pPr indent="0" marL="0">
-              <a:buNone/>
-            </a:pPr>
-            <a:r>
-              <a:rPr lang="en-US" sz="820" dirty="0">
+            <a:endParaRPr lang="en-US" sz="1100" dirty="0"/>
+          </a:p>
+          <a:p>
+            <a:pPr marL="0" indent="0">
+              <a:buNone/>
+            </a:pPr>
+            <a:r>
+              <a:rPr lang="en-US" sz="1100" dirty="0">
                 <a:solidFill>
                   <a:srgbClr val="142033"/>
                 </a:solidFill>
@@ -6236,14 +5884,14 @@
               </a:rPr>
               <a:t>▸  USB-C Charger — Tk 1800, stock 15</a:t>
             </a:r>
-            <a:endParaRPr lang="en-US" sz="820" dirty="0"/>
-          </a:p>
-          <a:p>
-            <a:pPr indent="0" marL="0">
-              <a:buNone/>
-            </a:pPr>
-            <a:r>
-              <a:rPr lang="en-US" sz="820" dirty="0">
+            <a:endParaRPr lang="en-US" sz="1100" dirty="0"/>
+          </a:p>
+          <a:p>
+            <a:pPr marL="0" indent="0">
+              <a:buNone/>
+            </a:pPr>
+            <a:r>
+              <a:rPr lang="en-US" sz="1100" dirty="0">
                 <a:solidFill>
                   <a:srgbClr val="142033"/>
                 </a:solidFill>
@@ -6253,14 +5901,14 @@
               </a:rPr>
               <a:t>▸  Gaming Headset — Tk 2800, stock 6</a:t>
             </a:r>
-            <a:endParaRPr lang="en-US" sz="820" dirty="0"/>
-          </a:p>
-          <a:p>
-            <a:pPr indent="0" marL="0">
-              <a:buNone/>
-            </a:pPr>
-            <a:r>
-              <a:rPr lang="en-US" sz="820" dirty="0">
+            <a:endParaRPr lang="en-US" sz="1100" dirty="0"/>
+          </a:p>
+          <a:p>
+            <a:pPr marL="0" indent="0">
+              <a:buNone/>
+            </a:pPr>
+            <a:r>
+              <a:rPr lang="en-US" sz="1100" dirty="0">
                 <a:solidFill>
                   <a:srgbClr val="142033"/>
                 </a:solidFill>
@@ -6270,7 +5918,7 @@
               </a:rPr>
               <a:t>▸  Mechanical Keyboard — Tk 3500, stock 8</a:t>
             </a:r>
-            <a:endParaRPr lang="en-US" sz="820" dirty="0"/>
+            <a:endParaRPr lang="en-US" sz="1100" dirty="0"/>
           </a:p>
         </p:txBody>
       </p:sp>
@@ -6290,6 +5938,7 @@
         <a:solidFill>
           <a:srgbClr val="FFFFFF"/>
         </a:solidFill>
+        <a:effectLst/>
       </p:bgPr>
     </p:bg>
     <p:spTree>
@@ -6327,7 +5976,7 @@
           <a:bodyPr wrap="square" lIns="0" tIns="0" rIns="0" bIns="0" rtlCol="0" anchor="ctr"/>
           <a:lstStyle/>
           <a:p>
-            <a:pPr indent="0" marL="0">
+            <a:pPr marL="0" indent="0">
               <a:buNone/>
             </a:pPr>
             <a:r>
@@ -6366,7 +6015,7 @@
           <a:bodyPr wrap="square" lIns="0" tIns="0" rIns="0" bIns="0" rtlCol="0" anchor="ctr"/>
           <a:lstStyle/>
           <a:p>
-            <a:pPr indent="0" marL="0">
+            <a:pPr marL="0" indent="0">
               <a:buNone/>
             </a:pPr>
             <a:r>
@@ -6455,7 +6104,7 @@
           <a:bodyPr wrap="square" lIns="0" tIns="0" rIns="0" bIns="0" rtlCol="0" anchor="ctr"/>
           <a:lstStyle/>
           <a:p>
-            <a:pPr indent="0" marL="0">
+            <a:pPr marL="0" indent="0">
               <a:buNone/>
             </a:pPr>
             <a:r>
@@ -6494,7 +6143,7 @@
           <a:bodyPr wrap="square" lIns="0" tIns="0" rIns="0" bIns="0" rtlCol="0" anchor="ctr"/>
           <a:lstStyle/>
           <a:p>
-            <a:pPr algn="r" indent="0" marL="0">
+            <a:pPr marL="0" indent="0" algn="r">
               <a:buNone/>
             </a:pPr>
             <a:r>
@@ -6533,7 +6182,7 @@
           <a:bodyPr wrap="square" lIns="254" tIns="254" rIns="254" bIns="254" rtlCol="0" anchor="ctr"/>
           <a:lstStyle/>
           <a:p>
-            <a:pPr indent="0" marL="0">
+            <a:pPr marL="0" indent="0">
               <a:buNone/>
             </a:pPr>
             <a:r>
@@ -6680,14 +6329,14 @@
       </p:sp>
       <p:pic>
         <p:nvPicPr>
-          <p:cNvPr id="14" name="Image 0" descr="/mnt/data/proposal_media/image-4-1.png">    </p:cNvPr>
+          <p:cNvPr id="14" name="Image 0" descr="/mnt/data/proposal_media/image-4-1.png"/>
           <p:cNvPicPr>
             <a:picLocks noChangeAspect="1"/>
           </p:cNvPicPr>
           <p:nvPr/>
         </p:nvPicPr>
         <p:blipFill>
-          <a:blip r:embed="rId1"/>
+          <a:blip r:embed="rId3"/>
           <a:stretch>
             <a:fillRect/>
           </a:stretch>
@@ -6725,7 +6374,7 @@
           </a:bodyPr>
           <a:lstStyle/>
           <a:p>
-            <a:pPr algn="ctr" indent="0" marL="0">
+            <a:pPr marL="0" indent="0" algn="ctr">
               <a:buNone/>
             </a:pPr>
             <a:r>
@@ -6772,14 +6421,14 @@
       </p:sp>
       <p:pic>
         <p:nvPicPr>
-          <p:cNvPr id="17" name="Image 1" descr="/mnt/data/proposal_media/image-5-1.png">    </p:cNvPr>
+          <p:cNvPr id="17" name="Image 1" descr="/mnt/data/proposal_media/image-5-1.png"/>
           <p:cNvPicPr>
             <a:picLocks noChangeAspect="1"/>
           </p:cNvPicPr>
           <p:nvPr/>
         </p:nvPicPr>
         <p:blipFill>
-          <a:blip r:embed="rId2"/>
+          <a:blip r:embed="rId4"/>
           <a:stretch>
             <a:fillRect/>
           </a:stretch>
@@ -6817,7 +6466,7 @@
           </a:bodyPr>
           <a:lstStyle/>
           <a:p>
-            <a:pPr algn="ctr" indent="0" marL="0">
+            <a:pPr marL="0" indent="0" algn="ctr">
               <a:buNone/>
             </a:pPr>
             <a:r>
@@ -6864,14 +6513,14 @@
       </p:sp>
       <p:pic>
         <p:nvPicPr>
-          <p:cNvPr id="20" name="Image 2" descr="/mnt/data/proposal_media/image-8-3.png">    </p:cNvPr>
+          <p:cNvPr id="20" name="Image 2" descr="/mnt/data/proposal_media/image-8-3.png"/>
           <p:cNvPicPr>
             <a:picLocks noChangeAspect="1"/>
           </p:cNvPicPr>
           <p:nvPr/>
         </p:nvPicPr>
         <p:blipFill>
-          <a:blip r:embed="rId3"/>
+          <a:blip r:embed="rId5"/>
           <a:stretch>
             <a:fillRect/>
           </a:stretch>
@@ -6909,7 +6558,7 @@
           </a:bodyPr>
           <a:lstStyle/>
           <a:p>
-            <a:pPr algn="ctr" indent="0" marL="0">
+            <a:pPr marL="0" indent="0" algn="ctr">
               <a:buNone/>
             </a:pPr>
             <a:r>
@@ -6926,7 +6575,7 @@
             <a:endParaRPr lang="en-US" sz="650" dirty="0"/>
           </a:p>
           <a:p>
-            <a:pPr algn="ctr" indent="0" marL="0">
+            <a:pPr marL="0" indent="0" algn="ctr">
               <a:buNone/>
             </a:pPr>
             <a:r>
@@ -6973,14 +6622,14 @@
       </p:sp>
       <p:pic>
         <p:nvPicPr>
-          <p:cNvPr id="23" name="Image 3" descr="/mnt/data/proposal_media/image-7-4.png">    </p:cNvPr>
+          <p:cNvPr id="23" name="Image 3" descr="/mnt/data/proposal_media/image-7-4.png"/>
           <p:cNvPicPr>
             <a:picLocks noChangeAspect="1"/>
           </p:cNvPicPr>
           <p:nvPr/>
         </p:nvPicPr>
         <p:blipFill>
-          <a:blip r:embed="rId4"/>
+          <a:blip r:embed="rId6"/>
           <a:stretch>
             <a:fillRect/>
           </a:stretch>
@@ -7018,7 +6667,7 @@
           </a:bodyPr>
           <a:lstStyle/>
           <a:p>
-            <a:pPr algn="ctr" indent="0" marL="0">
+            <a:pPr marL="0" indent="0" algn="ctr">
               <a:buNone/>
             </a:pPr>
             <a:r>
@@ -7035,7 +6684,7 @@
             <a:endParaRPr lang="en-US" sz="650" dirty="0"/>
           </a:p>
           <a:p>
-            <a:pPr algn="ctr" indent="0" marL="0">
+            <a:pPr marL="0" indent="0" algn="ctr">
               <a:buNone/>
             </a:pPr>
             <a:r>
@@ -7082,14 +6731,14 @@
       </p:sp>
       <p:pic>
         <p:nvPicPr>
-          <p:cNvPr id="26" name="Image 4" descr="/mnt/data/proposal_media/image-7-3.png">    </p:cNvPr>
+          <p:cNvPr id="26" name="Image 4" descr="/mnt/data/proposal_media/image-7-3.png"/>
           <p:cNvPicPr>
             <a:picLocks noChangeAspect="1"/>
           </p:cNvPicPr>
           <p:nvPr/>
         </p:nvPicPr>
         <p:blipFill>
-          <a:blip r:embed="rId5"/>
+          <a:blip r:embed="rId7"/>
           <a:stretch>
             <a:fillRect/>
           </a:stretch>
@@ -7127,7 +6776,7 @@
           </a:bodyPr>
           <a:lstStyle/>
           <a:p>
-            <a:pPr algn="ctr" indent="0" marL="0">
+            <a:pPr marL="0" indent="0" algn="ctr">
               <a:buNone/>
             </a:pPr>
             <a:r>
@@ -7144,7 +6793,7 @@
             <a:endParaRPr lang="en-US" sz="650" dirty="0"/>
           </a:p>
           <a:p>
-            <a:pPr algn="ctr" indent="0" marL="0">
+            <a:pPr marL="0" indent="0" algn="ctr">
               <a:buNone/>
             </a:pPr>
             <a:r>
@@ -7210,7 +6859,7 @@
           <a:bodyPr wrap="square" lIns="0" tIns="0" rIns="0" bIns="0" rtlCol="0" anchor="ctr"/>
           <a:lstStyle/>
           <a:p>
-            <a:pPr algn="ctr" indent="0" marL="0">
+            <a:pPr marL="0" indent="0" algn="ctr">
               <a:buNone/>
             </a:pPr>
             <a:r>
@@ -7244,6 +6893,7 @@
         <a:solidFill>
           <a:srgbClr val="FFFFFF"/>
         </a:solidFill>
+        <a:effectLst/>
       </p:bgPr>
     </p:bg>
     <p:spTree>
@@ -7281,7 +6931,7 @@
           <a:bodyPr wrap="square" lIns="0" tIns="0" rIns="0" bIns="0" rtlCol="0" anchor="ctr"/>
           <a:lstStyle/>
           <a:p>
-            <a:pPr indent="0" marL="0">
+            <a:pPr marL="0" indent="0">
               <a:buNone/>
             </a:pPr>
             <a:r>
@@ -7320,7 +6970,7 @@
           <a:bodyPr wrap="square" lIns="0" tIns="0" rIns="0" bIns="0" rtlCol="0" anchor="ctr"/>
           <a:lstStyle/>
           <a:p>
-            <a:pPr indent="0" marL="0">
+            <a:pPr marL="0" indent="0">
               <a:buNone/>
             </a:pPr>
             <a:r>
@@ -7409,7 +7059,7 @@
           <a:bodyPr wrap="square" lIns="0" tIns="0" rIns="0" bIns="0" rtlCol="0" anchor="ctr"/>
           <a:lstStyle/>
           <a:p>
-            <a:pPr indent="0" marL="0">
+            <a:pPr marL="0" indent="0">
               <a:buNone/>
             </a:pPr>
             <a:r>
@@ -7448,7 +7098,7 @@
           <a:bodyPr wrap="square" lIns="0" tIns="0" rIns="0" bIns="0" rtlCol="0" anchor="ctr"/>
           <a:lstStyle/>
           <a:p>
-            <a:pPr algn="r" indent="0" marL="0">
+            <a:pPr marL="0" indent="0" algn="r">
               <a:buNone/>
             </a:pPr>
             <a:r>
@@ -7487,7 +7137,7 @@
           <a:bodyPr wrap="square" lIns="254" tIns="254" rIns="254" bIns="254" rtlCol="0" anchor="ctr"/>
           <a:lstStyle/>
           <a:p>
-            <a:pPr indent="0" marL="0">
+            <a:pPr marL="0" indent="0">
               <a:buNone/>
             </a:pPr>
             <a:r>
@@ -7553,11 +7203,11 @@
           <a:bodyPr wrap="square" lIns="0" tIns="0" rIns="0" bIns="0" rtlCol="0" anchor="ctr"/>
           <a:lstStyle/>
           <a:p>
-            <a:pPr indent="0" marL="0">
-              <a:buNone/>
-            </a:pPr>
-            <a:r>
-              <a:rPr lang="en-US" sz="1250" b="1" dirty="0">
+            <a:pPr marL="0" indent="0">
+              <a:buNone/>
+            </a:pPr>
+            <a:r>
+              <a:rPr lang="en-US" b="1" dirty="0">
                 <a:solidFill>
                   <a:srgbClr val="0B1F3A"/>
                 </a:solidFill>
@@ -7567,7 +7217,7 @@
               </a:rPr>
               <a:t>Successful Checks</a:t>
             </a:r>
-            <a:endParaRPr lang="en-US" sz="1250" dirty="0"/>
+            <a:endParaRPr lang="en-US" dirty="0"/>
           </a:p>
         </p:txBody>
       </p:sp>
@@ -7594,11 +7244,11 @@
           </a:bodyPr>
           <a:lstStyle/>
           <a:p>
-            <a:pPr indent="0" marL="0">
-              <a:buNone/>
-            </a:pPr>
-            <a:r>
-              <a:rPr lang="en-US" sz="820" dirty="0">
+            <a:pPr marL="0" indent="0">
+              <a:buNone/>
+            </a:pPr>
+            <a:r>
+              <a:rPr lang="en-US" sz="1050" dirty="0">
                 <a:solidFill>
                   <a:srgbClr val="142033"/>
                 </a:solidFill>
@@ -7608,14 +7258,14 @@
               </a:rPr>
               <a:t>▸  python manage.py check passed with no issues</a:t>
             </a:r>
-            <a:endParaRPr lang="en-US" sz="820" dirty="0"/>
-          </a:p>
-          <a:p>
-            <a:pPr indent="0" marL="0">
-              <a:buNone/>
-            </a:pPr>
-            <a:r>
-              <a:rPr lang="en-US" sz="820" dirty="0">
+            <a:endParaRPr lang="en-US" sz="1050" dirty="0"/>
+          </a:p>
+          <a:p>
+            <a:pPr marL="0" indent="0">
+              <a:buNone/>
+            </a:pPr>
+            <a:r>
+              <a:rPr lang="en-US" sz="1050" dirty="0">
                 <a:solidFill>
                   <a:srgbClr val="142033"/>
                 </a:solidFill>
@@ -7625,14 +7275,14 @@
               </a:rPr>
               <a:t>▸  POST /api/ai/chat/ returned database products</a:t>
             </a:r>
-            <a:endParaRPr lang="en-US" sz="820" dirty="0"/>
-          </a:p>
-          <a:p>
-            <a:pPr indent="0" marL="0">
-              <a:buNone/>
-            </a:pPr>
-            <a:r>
-              <a:rPr lang="en-US" sz="820" dirty="0">
+            <a:endParaRPr lang="en-US" sz="1050" dirty="0"/>
+          </a:p>
+          <a:p>
+            <a:pPr marL="0" indent="0">
+              <a:buNone/>
+            </a:pPr>
+            <a:r>
+              <a:rPr lang="en-US" sz="1050" dirty="0">
                 <a:solidFill>
                   <a:srgbClr val="142033"/>
                 </a:solidFill>
@@ -7642,14 +7292,14 @@
               </a:rPr>
               <a:t>▸  React chatbot displayed the same product answers</a:t>
             </a:r>
-            <a:endParaRPr lang="en-US" sz="820" dirty="0"/>
-          </a:p>
-          <a:p>
-            <a:pPr indent="0" marL="0">
-              <a:buNone/>
-            </a:pPr>
-            <a:r>
-              <a:rPr lang="en-US" sz="820" dirty="0">
+            <a:endParaRPr lang="en-US" sz="1050" dirty="0"/>
+          </a:p>
+          <a:p>
+            <a:pPr marL="0" indent="0">
+              <a:buNone/>
+            </a:pPr>
+            <a:r>
+              <a:rPr lang="en-US" sz="1050" dirty="0">
                 <a:solidFill>
                   <a:srgbClr val="142033"/>
                 </a:solidFill>
@@ -7659,7 +7309,7 @@
               </a:rPr>
               <a:t>▸  Non-product questions still go to Ollama fallback</a:t>
             </a:r>
-            <a:endParaRPr lang="en-US" sz="820" dirty="0"/>
+            <a:endParaRPr lang="en-US" sz="1050" dirty="0"/>
           </a:p>
         </p:txBody>
       </p:sp>
@@ -7711,11 +7361,11 @@
           <a:bodyPr wrap="square" lIns="0" tIns="0" rIns="0" bIns="0" rtlCol="0" anchor="ctr"/>
           <a:lstStyle/>
           <a:p>
-            <a:pPr indent="0" marL="0">
-              <a:buNone/>
-            </a:pPr>
-            <a:r>
-              <a:rPr lang="en-US" sz="1250" b="1" dirty="0">
+            <a:pPr marL="0" indent="0">
+              <a:buNone/>
+            </a:pPr>
+            <a:r>
+              <a:rPr lang="en-US" b="1" dirty="0">
                 <a:solidFill>
                   <a:srgbClr val="0B1F3A"/>
                 </a:solidFill>
@@ -7725,7 +7375,7 @@
               </a:rPr>
               <a:t>Demonstration Prompts</a:t>
             </a:r>
-            <a:endParaRPr lang="en-US" sz="1250" dirty="0"/>
+            <a:endParaRPr lang="en-US" dirty="0"/>
           </a:p>
         </p:txBody>
       </p:sp>
@@ -7752,11 +7402,11 @@
           </a:bodyPr>
           <a:lstStyle/>
           <a:p>
-            <a:pPr indent="0" marL="0">
-              <a:buNone/>
-            </a:pPr>
-            <a:r>
-              <a:rPr lang="en-US" sz="840" dirty="0">
+            <a:pPr marL="0" indent="0">
+              <a:buNone/>
+            </a:pPr>
+            <a:r>
+              <a:rPr lang="en-US" sz="1000" dirty="0">
                 <a:solidFill>
                   <a:srgbClr val="142033"/>
                 </a:solidFill>
@@ -7766,14 +7416,14 @@
               </a:rPr>
               <a:t>1. What products are available?</a:t>
             </a:r>
-            <a:endParaRPr lang="en-US" sz="840" dirty="0"/>
-          </a:p>
-          <a:p>
-            <a:pPr indent="0" marL="0">
-              <a:buNone/>
-            </a:pPr>
-            <a:r>
-              <a:rPr lang="en-US" sz="840" dirty="0">
+            <a:endParaRPr lang="en-US" sz="1000" dirty="0"/>
+          </a:p>
+          <a:p>
+            <a:pPr marL="0" indent="0">
+              <a:buNone/>
+            </a:pPr>
+            <a:r>
+              <a:rPr lang="en-US" sz="1000" dirty="0">
                 <a:solidFill>
                   <a:srgbClr val="142033"/>
                 </a:solidFill>
@@ -7783,14 +7433,14 @@
               </a:rPr>
               <a:t>2. Show me products under 2000 taka</a:t>
             </a:r>
-            <a:endParaRPr lang="en-US" sz="840" dirty="0"/>
-          </a:p>
-          <a:p>
-            <a:pPr indent="0" marL="0">
-              <a:buNone/>
-            </a:pPr>
-            <a:r>
-              <a:rPr lang="en-US" sz="840" dirty="0">
+            <a:endParaRPr lang="en-US" sz="1000" dirty="0"/>
+          </a:p>
+          <a:p>
+            <a:pPr marL="0" indent="0">
+              <a:buNone/>
+            </a:pPr>
+            <a:r>
+              <a:rPr lang="en-US" sz="1000" dirty="0">
                 <a:solidFill>
                   <a:srgbClr val="142033"/>
                 </a:solidFill>
@@ -7800,7 +7450,7 @@
               </a:rPr>
               <a:t>3. Tell me about the Wireless Mouse</a:t>
             </a:r>
-            <a:endParaRPr lang="en-US" sz="840" dirty="0"/>
+            <a:endParaRPr lang="en-US" sz="1000" dirty="0"/>
           </a:p>
         </p:txBody>
       </p:sp>
@@ -7823,15 +7473,15 @@
         </p:spPr>
         <p:txBody>
           <a:bodyPr wrap="square" lIns="254" tIns="254" rIns="254" bIns="254" rtlCol="0" anchor="ctr">
-            <a:normAutofit/>
+            <a:normAutofit lnSpcReduction="10000"/>
           </a:bodyPr>
           <a:lstStyle/>
           <a:p>
-            <a:pPr indent="0" marL="0">
-              <a:buNone/>
-            </a:pPr>
-            <a:r>
-              <a:rPr lang="en-US" sz="820" b="1" dirty="0">
+            <a:pPr marL="0" indent="0">
+              <a:buNone/>
+            </a:pPr>
+            <a:r>
+              <a:rPr lang="en-US" sz="1000" b="1" dirty="0">
                 <a:solidFill>
                   <a:srgbClr val="0B1F3A"/>
                 </a:solidFill>
@@ -7841,7 +7491,7 @@
               </a:rPr>
               <a:t>Expected output: product names, prices, one-line descriptions and stock information from the Product table.</a:t>
             </a:r>
-            <a:endParaRPr lang="en-US" sz="820" dirty="0"/>
+            <a:endParaRPr lang="en-US" sz="1000" dirty="0"/>
           </a:p>
         </p:txBody>
       </p:sp>
@@ -7861,6 +7511,7 @@
         <a:solidFill>
           <a:srgbClr val="FFFFFF"/>
         </a:solidFill>
+        <a:effectLst/>
       </p:bgPr>
     </p:bg>
     <p:spTree>
@@ -7898,7 +7549,7 @@
           <a:bodyPr wrap="square" lIns="0" tIns="0" rIns="0" bIns="0" rtlCol="0" anchor="ctr"/>
           <a:lstStyle/>
           <a:p>
-            <a:pPr indent="0" marL="0">
+            <a:pPr marL="0" indent="0">
               <a:buNone/>
             </a:pPr>
             <a:r>
@@ -7937,7 +7588,7 @@
           <a:bodyPr wrap="square" lIns="0" tIns="0" rIns="0" bIns="0" rtlCol="0" anchor="ctr"/>
           <a:lstStyle/>
           <a:p>
-            <a:pPr indent="0" marL="0">
+            <a:pPr marL="0" indent="0">
               <a:buNone/>
             </a:pPr>
             <a:r>
@@ -8026,7 +7677,7 @@
           <a:bodyPr wrap="square" lIns="0" tIns="0" rIns="0" bIns="0" rtlCol="0" anchor="ctr"/>
           <a:lstStyle/>
           <a:p>
-            <a:pPr indent="0" marL="0">
+            <a:pPr marL="0" indent="0">
               <a:buNone/>
             </a:pPr>
             <a:r>
@@ -8065,7 +7716,7 @@
           <a:bodyPr wrap="square" lIns="0" tIns="0" rIns="0" bIns="0" rtlCol="0" anchor="ctr"/>
           <a:lstStyle/>
           <a:p>
-            <a:pPr algn="r" indent="0" marL="0">
+            <a:pPr marL="0" indent="0" algn="r">
               <a:buNone/>
             </a:pPr>
             <a:r>
@@ -8104,7 +7755,7 @@
           <a:bodyPr wrap="square" lIns="254" tIns="254" rIns="254" bIns="254" rtlCol="0" anchor="ctr"/>
           <a:lstStyle/>
           <a:p>
-            <a:pPr indent="0" marL="0">
+            <a:pPr marL="0" indent="0">
               <a:buNone/>
             </a:pPr>
             <a:r>
@@ -8130,7 +7781,7 @@
         </p:nvSpPr>
         <p:spPr>
           <a:xfrm>
-            <a:off x="502920" y="1627632"/>
+            <a:off x="2628900" y="1627632"/>
             <a:ext cx="3886200" cy="2487168"/>
           </a:xfrm>
           <a:prstGeom prst="roundRect">
@@ -8157,7 +7808,7 @@
         </p:nvSpPr>
         <p:spPr>
           <a:xfrm>
-            <a:off x="777240" y="1883664"/>
+            <a:off x="2903220" y="1754468"/>
             <a:ext cx="3337560" cy="219456"/>
           </a:xfrm>
           <a:prstGeom prst="rect">
@@ -8170,11 +7821,11 @@
           <a:bodyPr wrap="square" lIns="0" tIns="0" rIns="0" bIns="0" rtlCol="0" anchor="ctr"/>
           <a:lstStyle/>
           <a:p>
-            <a:pPr indent="0" marL="0">
-              <a:buNone/>
-            </a:pPr>
-            <a:r>
-              <a:rPr lang="en-US" sz="1230" b="1" dirty="0">
+            <a:pPr marL="0" indent="0">
+              <a:buNone/>
+            </a:pPr>
+            <a:r>
+              <a:rPr lang="en-US" b="1" dirty="0">
                 <a:solidFill>
                   <a:srgbClr val="0B1F3A"/>
                 </a:solidFill>
@@ -8184,7 +7835,7 @@
               </a:rPr>
               <a:t>Completed for Update 3</a:t>
             </a:r>
-            <a:endParaRPr lang="en-US" sz="1230" dirty="0"/>
+            <a:endParaRPr lang="en-US" dirty="0"/>
           </a:p>
         </p:txBody>
       </p:sp>
@@ -8196,8 +7847,8 @@
         </p:nvSpPr>
         <p:spPr>
           <a:xfrm>
-            <a:off x="777240" y="2221992"/>
-            <a:ext cx="3337560" cy="1234440"/>
+            <a:off x="2857500" y="2320214"/>
+            <a:ext cx="3337560" cy="1578545"/>
           </a:xfrm>
           <a:prstGeom prst="rect">
             <a:avLst/>
@@ -8211,11 +7862,11 @@
           </a:bodyPr>
           <a:lstStyle/>
           <a:p>
-            <a:pPr indent="0" marL="0">
-              <a:buNone/>
-            </a:pPr>
-            <a:r>
-              <a:rPr lang="en-US" sz="800" dirty="0">
+            <a:pPr marL="0" indent="0">
+              <a:buNone/>
+            </a:pPr>
+            <a:r>
+              <a:rPr lang="en-US" sz="1200" dirty="0">
                 <a:solidFill>
                   <a:srgbClr val="142033"/>
                 </a:solidFill>
@@ -8225,14 +7876,14 @@
               </a:rPr>
               <a:t>▸  Frontend pages and chatbot UI available</a:t>
             </a:r>
-            <a:endParaRPr lang="en-US" sz="800" dirty="0"/>
-          </a:p>
-          <a:p>
-            <a:pPr indent="0" marL="0">
-              <a:buNone/>
-            </a:pPr>
-            <a:r>
-              <a:rPr lang="en-US" sz="800" dirty="0">
+            <a:endParaRPr lang="en-US" sz="1200" dirty="0"/>
+          </a:p>
+          <a:p>
+            <a:pPr marL="0" indent="0">
+              <a:buNone/>
+            </a:pPr>
+            <a:r>
+              <a:rPr lang="en-US" sz="1200" dirty="0">
                 <a:solidFill>
                   <a:srgbClr val="142033"/>
                 </a:solidFill>
@@ -8242,14 +7893,14 @@
               </a:rPr>
               <a:t>▸  Django API modules and permission work updated</a:t>
             </a:r>
-            <a:endParaRPr lang="en-US" sz="800" dirty="0"/>
-          </a:p>
-          <a:p>
-            <a:pPr indent="0" marL="0">
-              <a:buNone/>
-            </a:pPr>
-            <a:r>
-              <a:rPr lang="en-US" sz="800" dirty="0">
+            <a:endParaRPr lang="en-US" sz="1200" dirty="0"/>
+          </a:p>
+          <a:p>
+            <a:pPr marL="0" indent="0">
+              <a:buNone/>
+            </a:pPr>
+            <a:r>
+              <a:rPr lang="en-US" sz="1200" dirty="0">
                 <a:solidFill>
                   <a:srgbClr val="142033"/>
                 </a:solidFill>
@@ -8259,14 +7910,14 @@
               </a:rPr>
               <a:t>▸  Product records added through Django Admin</a:t>
             </a:r>
-            <a:endParaRPr lang="en-US" sz="800" dirty="0"/>
-          </a:p>
-          <a:p>
-            <a:pPr indent="0" marL="0">
-              <a:buNone/>
-            </a:pPr>
-            <a:r>
-              <a:rPr lang="en-US" sz="800" dirty="0">
+            <a:endParaRPr lang="en-US" sz="1200" dirty="0"/>
+          </a:p>
+          <a:p>
+            <a:pPr marL="0" indent="0">
+              <a:buNone/>
+            </a:pPr>
+            <a:r>
+              <a:rPr lang="en-US" sz="1200" dirty="0">
                 <a:solidFill>
                   <a:srgbClr val="142033"/>
                 </a:solidFill>
@@ -8276,14 +7927,14 @@
               </a:rPr>
               <a:t>▸  Chatbot answers product queries from database</a:t>
             </a:r>
-            <a:endParaRPr lang="en-US" sz="800" dirty="0"/>
-          </a:p>
-          <a:p>
-            <a:pPr indent="0" marL="0">
-              <a:buNone/>
-            </a:pPr>
-            <a:r>
-              <a:rPr lang="en-US" sz="800" dirty="0">
+            <a:endParaRPr lang="en-US" sz="1200" dirty="0"/>
+          </a:p>
+          <a:p>
+            <a:pPr marL="0" indent="0">
+              <a:buNone/>
+            </a:pPr>
+            <a:r>
+              <a:rPr lang="en-US" sz="1200" dirty="0">
                 <a:solidFill>
                   <a:srgbClr val="142033"/>
                 </a:solidFill>
@@ -8293,209 +7944,10 @@
               </a:rPr>
               <a:t>▸  Feature tested through API and React interface</a:t>
             </a:r>
-            <a:endParaRPr lang="en-US" sz="800" dirty="0"/>
-          </a:p>
-        </p:txBody>
-      </p:sp>
-      <p:sp>
-        <p:nvSpPr>
-          <p:cNvPr id="12" name="Shape 10"/>
-          <p:cNvSpPr/>
-          <p:nvPr/>
-        </p:nvSpPr>
-        <p:spPr>
-          <a:xfrm>
-            <a:off x="4617720" y="1627632"/>
-            <a:ext cx="4023360" cy="2487168"/>
-          </a:xfrm>
-          <a:prstGeom prst="roundRect">
-            <a:avLst>
-              <a:gd name="adj" fmla="val 2574"/>
-            </a:avLst>
-          </a:prstGeom>
-          <a:solidFill>
-            <a:srgbClr val="FFF9EC"/>
-          </a:solidFill>
-          <a:ln w="11430">
-            <a:solidFill>
-              <a:srgbClr val="FFE4A8"/>
-            </a:solidFill>
-            <a:prstDash val="solid"/>
-          </a:ln>
-        </p:spPr>
-      </p:sp>
-      <p:sp>
-        <p:nvSpPr>
-          <p:cNvPr id="13" name="Text 11"/>
-          <p:cNvSpPr/>
-          <p:nvPr/>
-        </p:nvSpPr>
-        <p:spPr>
-          <a:xfrm>
-            <a:off x="4892040" y="1883664"/>
-            <a:ext cx="3383280" cy="219456"/>
-          </a:xfrm>
-          <a:prstGeom prst="rect">
-            <a:avLst/>
-          </a:prstGeom>
-          <a:noFill/>
-          <a:ln/>
-        </p:spPr>
-        <p:txBody>
-          <a:bodyPr wrap="square" lIns="0" tIns="0" rIns="0" bIns="0" rtlCol="0" anchor="ctr"/>
-          <a:lstStyle/>
-          <a:p>
-            <a:pPr indent="0" marL="0">
-              <a:buNone/>
-            </a:pPr>
-            <a:r>
-              <a:rPr lang="en-US" sz="1230" b="1" dirty="0">
-                <a:solidFill>
-                  <a:srgbClr val="0B1F3A"/>
-                </a:solidFill>
-                <a:latin typeface="Aptos Display" pitchFamily="34" charset="0"/>
-                <a:ea typeface="Aptos Display" pitchFamily="34" charset="-122"/>
-                <a:cs typeface="Aptos Display" pitchFamily="34" charset="-120"/>
-              </a:rPr>
-              <a:t>Next Work</a:t>
-            </a:r>
-            <a:endParaRPr lang="en-US" sz="1230" dirty="0"/>
-          </a:p>
-        </p:txBody>
-      </p:sp>
-      <p:sp>
-        <p:nvSpPr>
-          <p:cNvPr id="14" name="Text 12"/>
-          <p:cNvSpPr/>
-          <p:nvPr/>
-        </p:nvSpPr>
-        <p:spPr>
-          <a:xfrm>
-            <a:off x="4892040" y="2221992"/>
-            <a:ext cx="3383280" cy="1261872"/>
-          </a:xfrm>
-          <a:prstGeom prst="rect">
-            <a:avLst/>
-          </a:prstGeom>
-          <a:noFill/>
-          <a:ln/>
-        </p:spPr>
-        <p:txBody>
-          <a:bodyPr wrap="square" lIns="254" tIns="254" rIns="254" bIns="254" rtlCol="0" anchor="ctr">
-            <a:normAutofit/>
-          </a:bodyPr>
-          <a:lstStyle/>
-          <a:p>
-            <a:pPr indent="0" marL="0">
-              <a:buNone/>
-            </a:pPr>
-            <a:r>
-              <a:rPr lang="en-US" sz="800" dirty="0">
-                <a:solidFill>
-                  <a:srgbClr val="142033"/>
-                </a:solidFill>
-                <a:latin typeface="Aptos" pitchFamily="34" charset="0"/>
-                <a:ea typeface="Aptos" pitchFamily="34" charset="-122"/>
-                <a:cs typeface="Aptos" pitchFamily="34" charset="-120"/>
-              </a:rPr>
-              <a:t>▸  Test Rahat’s APIs in browser and Postman</a:t>
-            </a:r>
-            <a:endParaRPr lang="en-US" sz="800" dirty="0"/>
-          </a:p>
-          <a:p>
-            <a:pPr indent="0" marL="0">
-              <a:buNone/>
-            </a:pPr>
-            <a:r>
-              <a:rPr lang="en-US" sz="800" dirty="0">
-                <a:solidFill>
-                  <a:srgbClr val="142033"/>
-                </a:solidFill>
-                <a:latin typeface="Aptos" pitchFamily="34" charset="0"/>
-                <a:ea typeface="Aptos" pitchFamily="34" charset="-122"/>
-                <a:cs typeface="Aptos" pitchFamily="34" charset="-120"/>
-              </a:rPr>
-              <a:t>▸  Create seed data or fixture for sample products</a:t>
-            </a:r>
-            <a:endParaRPr lang="en-US" sz="800" dirty="0"/>
-          </a:p>
-          <a:p>
-            <a:pPr indent="0" marL="0">
-              <a:buNone/>
-            </a:pPr>
-            <a:r>
-              <a:rPr lang="en-US" sz="800" dirty="0">
-                <a:solidFill>
-                  <a:srgbClr val="142033"/>
-                </a:solidFill>
-                <a:latin typeface="Aptos" pitchFamily="34" charset="0"/>
-                <a:ea typeface="Aptos" pitchFamily="34" charset="-122"/>
-                <a:cs typeface="Aptos" pitchFamily="34" charset="-120"/>
-              </a:rPr>
-              <a:t>▸  Merge latest frontend into backend repository as frontend/</a:t>
-            </a:r>
-            <a:endParaRPr lang="en-US" sz="800" dirty="0"/>
-          </a:p>
-          <a:p>
-            <a:pPr indent="0" marL="0">
-              <a:buNone/>
-            </a:pPr>
-            <a:r>
-              <a:rPr lang="en-US" sz="800" dirty="0">
-                <a:solidFill>
-                  <a:srgbClr val="142033"/>
-                </a:solidFill>
-                <a:latin typeface="Aptos" pitchFamily="34" charset="0"/>
-                <a:ea typeface="Aptos" pitchFamily="34" charset="-122"/>
-                <a:cs typeface="Aptos" pitchFamily="34" charset="-120"/>
-              </a:rPr>
-              <a:t>▸  Update README and organize GitHub submission files</a:t>
-            </a:r>
-            <a:endParaRPr lang="en-US" sz="800" dirty="0"/>
-          </a:p>
-          <a:p>
-            <a:pPr indent="0" marL="0">
-              <a:buNone/>
-            </a:pPr>
-            <a:r>
-              <a:rPr lang="en-US" sz="800" dirty="0">
-                <a:solidFill>
-                  <a:srgbClr val="142033"/>
-                </a:solidFill>
-                <a:latin typeface="Aptos" pitchFamily="34" charset="0"/>
-                <a:ea typeface="Aptos" pitchFamily="34" charset="-122"/>
-                <a:cs typeface="Aptos" pitchFamily="34" charset="-120"/>
-              </a:rPr>
-              <a:t>▸  Resolve pending accounts migration warning</a:t>
-            </a:r>
-            <a:endParaRPr lang="en-US" sz="800" dirty="0"/>
-          </a:p>
-        </p:txBody>
-      </p:sp>
-      <p:pic>
-        <p:nvPicPr>
-          <p:cNvPr id="15" name="Image 0" descr="/mnt/data/proposal_media/image-2-1.png">    </p:cNvPr>
-          <p:cNvPicPr>
-            <a:picLocks noChangeAspect="1"/>
-          </p:cNvPicPr>
-          <p:nvPr/>
-        </p:nvPicPr>
-        <p:blipFill>
-          <a:blip r:embed="rId1"/>
-          <a:stretch>
-            <a:fillRect/>
-          </a:stretch>
-        </p:blipFill>
-        <p:spPr>
-          <a:xfrm>
-            <a:off x="8101584" y="3730752"/>
-            <a:ext cx="320040" cy="320040"/>
-          </a:xfrm>
-          <a:prstGeom prst="rect">
-            <a:avLst/>
-          </a:prstGeom>
-        </p:spPr>
-      </p:pic>
+            <a:endParaRPr lang="en-US" sz="1200" dirty="0"/>
+          </a:p>
+        </p:txBody>
+      </p:sp>
     </p:spTree>
   </p:cSld>
   <p:clrMapOvr>
@@ -8797,4 +8249,319 @@
     </a:ext>
   </a:extLst>
 </a:theme>
+</file>
+
+<file path=ppt/theme/theme2.xml><?xml version="1.0" encoding="utf-8"?>
+<a:theme xmlns:a="http://schemas.openxmlformats.org/drawingml/2006/main" name="Office Theme">
+  <a:themeElements>
+    <a:clrScheme name="Office">
+      <a:dk1>
+        <a:sysClr val="windowText" lastClr="000000"/>
+      </a:dk1>
+      <a:lt1>
+        <a:sysClr val="window" lastClr="FFFFFF"/>
+      </a:lt1>
+      <a:dk2>
+        <a:srgbClr val="0E2841"/>
+      </a:dk2>
+      <a:lt2>
+        <a:srgbClr val="E8E8E8"/>
+      </a:lt2>
+      <a:accent1>
+        <a:srgbClr val="156082"/>
+      </a:accent1>
+      <a:accent2>
+        <a:srgbClr val="E97132"/>
+      </a:accent2>
+      <a:accent3>
+        <a:srgbClr val="196B24"/>
+      </a:accent3>
+      <a:accent4>
+        <a:srgbClr val="0F9ED5"/>
+      </a:accent4>
+      <a:accent5>
+        <a:srgbClr val="A02B93"/>
+      </a:accent5>
+      <a:accent6>
+        <a:srgbClr val="4EA72E"/>
+      </a:accent6>
+      <a:hlink>
+        <a:srgbClr val="467886"/>
+      </a:hlink>
+      <a:folHlink>
+        <a:srgbClr val="96607D"/>
+      </a:folHlink>
+    </a:clrScheme>
+    <a:fontScheme name="Office">
+      <a:majorFont>
+        <a:latin typeface="Aptos Display" panose="02110004020202020204"/>
+        <a:ea typeface=""/>
+        <a:cs typeface=""/>
+        <a:font script="Jpan" typeface="游ゴシック Light"/>
+        <a:font script="Hang" typeface="맑은 고딕"/>
+        <a:font script="Hans" typeface="等线 Light"/>
+        <a:font script="Hant" typeface="新細明體"/>
+        <a:font script="Arab" typeface="Times New Roman"/>
+        <a:font script="Hebr" typeface="Times New Roman"/>
+        <a:font script="Thai" typeface="Angsana New"/>
+        <a:font script="Ethi" typeface="Nyala"/>
+        <a:font script="Beng" typeface="Vrinda"/>
+        <a:font script="Gujr" typeface="Shruti"/>
+        <a:font script="Khmr" typeface="MoolBoran"/>
+        <a:font script="Knda" typeface="Tunga"/>
+        <a:font script="Guru" typeface="Raavi"/>
+        <a:font script="Cans" typeface="Euphemia"/>
+        <a:font script="Cher" typeface="Plantagenet Cherokee"/>
+        <a:font script="Yiii" typeface="Microsoft Yi Baiti"/>
+        <a:font script="Tibt" typeface="Microsoft Himalaya"/>
+        <a:font script="Thaa" typeface="MV Boli"/>
+        <a:font script="Deva" typeface="Mangal"/>
+        <a:font script="Telu" typeface="Gautami"/>
+        <a:font script="Taml" typeface="Latha"/>
+        <a:font script="Syrc" typeface="Estrangelo Edessa"/>
+        <a:font script="Orya" typeface="Kalinga"/>
+        <a:font script="Mlym" typeface="Kartika"/>
+        <a:font script="Laoo" typeface="DokChampa"/>
+        <a:font script="Sinh" typeface="Iskoola Pota"/>
+        <a:font script="Mong" typeface="Mongolian Baiti"/>
+        <a:font script="Viet" typeface="Times New Roman"/>
+        <a:font script="Uigh" typeface="Microsoft Uighur"/>
+        <a:font script="Geor" typeface="Sylfaen"/>
+        <a:font script="Armn" typeface="Arial"/>
+        <a:font script="Bugi" typeface="Leelawadee UI"/>
+        <a:font script="Bopo" typeface="Microsoft JhengHei"/>
+        <a:font script="Java" typeface="Javanese Text"/>
+        <a:font script="Lisu" typeface="Segoe UI"/>
+        <a:font script="Mymr" typeface="Myanmar Text"/>
+        <a:font script="Nkoo" typeface="Ebrima"/>
+        <a:font script="Olck" typeface="Nirmala UI"/>
+        <a:font script="Osma" typeface="Ebrima"/>
+        <a:font script="Phag" typeface="Phagspa"/>
+        <a:font script="Syrn" typeface="Estrangelo Edessa"/>
+        <a:font script="Syrj" typeface="Estrangelo Edessa"/>
+        <a:font script="Syre" typeface="Estrangelo Edessa"/>
+        <a:font script="Sora" typeface="Nirmala UI"/>
+        <a:font script="Tale" typeface="Microsoft Tai Le"/>
+        <a:font script="Talu" typeface="Microsoft New Tai Lue"/>
+        <a:font script="Tfng" typeface="Ebrima"/>
+      </a:majorFont>
+      <a:minorFont>
+        <a:latin typeface="Aptos" panose="02110004020202020204"/>
+        <a:ea typeface=""/>
+        <a:cs typeface=""/>
+        <a:font script="Jpan" typeface="游ゴシック"/>
+        <a:font script="Hang" typeface="맑은 고딕"/>
+        <a:font script="Hans" typeface="等线"/>
+        <a:font script="Hant" typeface="新細明體"/>
+        <a:font script="Arab" typeface="Arial"/>
+        <a:font script="Hebr" typeface="Arial"/>
+        <a:font script="Thai" typeface="Cordia New"/>
+        <a:font script="Ethi" typeface="Nyala"/>
+        <a:font script="Beng" typeface="Vrinda"/>
+        <a:font script="Gujr" typeface="Shruti"/>
+        <a:font script="Khmr" typeface="DaunPenh"/>
+        <a:font script="Knda" typeface="Tunga"/>
+        <a:font script="Guru" typeface="Raavi"/>
+        <a:font script="Cans" typeface="Euphemia"/>
+        <a:font script="Cher" typeface="Plantagenet Cherokee"/>
+        <a:font script="Yiii" typeface="Microsoft Yi Baiti"/>
+        <a:font script="Tibt" typeface="Microsoft Himalaya"/>
+        <a:font script="Thaa" typeface="MV Boli"/>
+        <a:font script="Deva" typeface="Mangal"/>
+        <a:font script="Telu" typeface="Gautami"/>
+        <a:font script="Taml" typeface="Latha"/>
+        <a:font script="Syrc" typeface="Estrangelo Edessa"/>
+        <a:font script="Orya" typeface="Kalinga"/>
+        <a:font script="Mlym" typeface="Kartika"/>
+        <a:font script="Laoo" typeface="DokChampa"/>
+        <a:font script="Sinh" typeface="Iskoola Pota"/>
+        <a:font script="Mong" typeface="Mongolian Baiti"/>
+        <a:font script="Viet" typeface="Arial"/>
+        <a:font script="Uigh" typeface="Microsoft Uighur"/>
+        <a:font script="Geor" typeface="Sylfaen"/>
+        <a:font script="Armn" typeface="Arial"/>
+        <a:font script="Bugi" typeface="Leelawadee UI"/>
+        <a:font script="Bopo" typeface="Microsoft JhengHei"/>
+        <a:font script="Java" typeface="Javanese Text"/>
+        <a:font script="Lisu" typeface="Segoe UI"/>
+        <a:font script="Mymr" typeface="Myanmar Text"/>
+        <a:font script="Nkoo" typeface="Ebrima"/>
+        <a:font script="Olck" typeface="Nirmala UI"/>
+        <a:font script="Osma" typeface="Ebrima"/>
+        <a:font script="Phag" typeface="Phagspa"/>
+        <a:font script="Syrn" typeface="Estrangelo Edessa"/>
+        <a:font script="Syrj" typeface="Estrangelo Edessa"/>
+        <a:font script="Syre" typeface="Estrangelo Edessa"/>
+        <a:font script="Sora" typeface="Nirmala UI"/>
+        <a:font script="Tale" typeface="Microsoft Tai Le"/>
+        <a:font script="Talu" typeface="Microsoft New Tai Lue"/>
+        <a:font script="Tfng" typeface="Ebrima"/>
+      </a:minorFont>
+    </a:fontScheme>
+    <a:fmtScheme name="Office">
+      <a:fillStyleLst>
+        <a:solidFill>
+          <a:schemeClr val="phClr"/>
+        </a:solidFill>
+        <a:gradFill rotWithShape="1">
+          <a:gsLst>
+            <a:gs pos="0">
+              <a:schemeClr val="phClr">
+                <a:lumMod val="110000"/>
+                <a:satMod val="105000"/>
+                <a:tint val="67000"/>
+              </a:schemeClr>
+            </a:gs>
+            <a:gs pos="50000">
+              <a:schemeClr val="phClr">
+                <a:lumMod val="105000"/>
+                <a:satMod val="103000"/>
+                <a:tint val="73000"/>
+              </a:schemeClr>
+            </a:gs>
+            <a:gs pos="100000">
+              <a:schemeClr val="phClr">
+                <a:lumMod val="105000"/>
+                <a:satMod val="109000"/>
+                <a:tint val="81000"/>
+              </a:schemeClr>
+            </a:gs>
+          </a:gsLst>
+          <a:lin ang="5400000" scaled="0"/>
+        </a:gradFill>
+        <a:gradFill rotWithShape="1">
+          <a:gsLst>
+            <a:gs pos="0">
+              <a:schemeClr val="phClr">
+                <a:satMod val="103000"/>
+                <a:lumMod val="102000"/>
+                <a:tint val="94000"/>
+              </a:schemeClr>
+            </a:gs>
+            <a:gs pos="50000">
+              <a:schemeClr val="phClr">
+                <a:satMod val="110000"/>
+                <a:lumMod val="100000"/>
+                <a:shade val="100000"/>
+              </a:schemeClr>
+            </a:gs>
+            <a:gs pos="100000">
+              <a:schemeClr val="phClr">
+                <a:lumMod val="99000"/>
+                <a:satMod val="120000"/>
+                <a:shade val="78000"/>
+              </a:schemeClr>
+            </a:gs>
+          </a:gsLst>
+          <a:lin ang="5400000" scaled="0"/>
+        </a:gradFill>
+      </a:fillStyleLst>
+      <a:lnStyleLst>
+        <a:ln w="12700" cap="flat" cmpd="sng" algn="ctr">
+          <a:solidFill>
+            <a:schemeClr val="phClr"/>
+          </a:solidFill>
+          <a:prstDash val="solid"/>
+          <a:miter lim="800000"/>
+        </a:ln>
+        <a:ln w="19050" cap="flat" cmpd="sng" algn="ctr">
+          <a:solidFill>
+            <a:schemeClr val="phClr"/>
+          </a:solidFill>
+          <a:prstDash val="solid"/>
+          <a:miter lim="800000"/>
+        </a:ln>
+        <a:ln w="25400" cap="flat" cmpd="sng" algn="ctr">
+          <a:solidFill>
+            <a:schemeClr val="phClr"/>
+          </a:solidFill>
+          <a:prstDash val="solid"/>
+          <a:miter lim="800000"/>
+        </a:ln>
+      </a:lnStyleLst>
+      <a:effectStyleLst>
+        <a:effectStyle>
+          <a:effectLst/>
+        </a:effectStyle>
+        <a:effectStyle>
+          <a:effectLst/>
+        </a:effectStyle>
+        <a:effectStyle>
+          <a:effectLst>
+            <a:outerShdw blurRad="57150" dist="19050" dir="5400000" algn="ctr" rotWithShape="0">
+              <a:srgbClr val="000000">
+                <a:alpha val="63000"/>
+              </a:srgbClr>
+            </a:outerShdw>
+          </a:effectLst>
+        </a:effectStyle>
+      </a:effectStyleLst>
+      <a:bgFillStyleLst>
+        <a:solidFill>
+          <a:schemeClr val="phClr"/>
+        </a:solidFill>
+        <a:solidFill>
+          <a:schemeClr val="phClr">
+            <a:tint val="95000"/>
+            <a:satMod val="170000"/>
+          </a:schemeClr>
+        </a:solidFill>
+        <a:gradFill rotWithShape="1">
+          <a:gsLst>
+            <a:gs pos="0">
+              <a:schemeClr val="phClr">
+                <a:tint val="93000"/>
+                <a:satMod val="150000"/>
+                <a:shade val="98000"/>
+                <a:lumMod val="102000"/>
+              </a:schemeClr>
+            </a:gs>
+            <a:gs pos="50000">
+              <a:schemeClr val="phClr">
+                <a:tint val="98000"/>
+                <a:satMod val="130000"/>
+                <a:shade val="90000"/>
+                <a:lumMod val="103000"/>
+              </a:schemeClr>
+            </a:gs>
+            <a:gs pos="100000">
+              <a:schemeClr val="phClr">
+                <a:shade val="63000"/>
+                <a:satMod val="120000"/>
+              </a:schemeClr>
+            </a:gs>
+          </a:gsLst>
+          <a:lin ang="5400000" scaled="0"/>
+        </a:gradFill>
+      </a:bgFillStyleLst>
+    </a:fmtScheme>
+  </a:themeElements>
+  <a:objectDefaults>
+    <a:lnDef>
+      <a:spPr/>
+      <a:bodyPr/>
+      <a:lstStyle/>
+      <a:style>
+        <a:lnRef idx="2">
+          <a:schemeClr val="accent1"/>
+        </a:lnRef>
+        <a:fillRef idx="0">
+          <a:schemeClr val="accent1"/>
+        </a:fillRef>
+        <a:effectRef idx="1">
+          <a:schemeClr val="accent1"/>
+        </a:effectRef>
+        <a:fontRef idx="minor">
+          <a:schemeClr val="tx1"/>
+        </a:fontRef>
+      </a:style>
+    </a:lnDef>
+  </a:objectDefaults>
+  <a:extraClrSchemeLst/>
+  <a:extLst>
+    <a:ext uri="{05A4C25C-085E-4340-85A3-A5531E510DB2}">
+      <thm15:themeFamily xmlns:thm15="http://schemas.microsoft.com/office/thememl/2012/main" name="Office Theme" id="{2E142A2C-CD16-42D6-873A-C26D2A0506FA}" vid="{1BDDFF52-6CD6-40A5-AB3C-68EB2F1E4D0A}"/>
+    </a:ext>
+  </a:extLst>
+</a:theme>
 </file>